--- a/.lessons/26 Fundamental Cache/5 Using Cache With Pagination/1.pptx
+++ b/.lessons/26 Fundamental Cache/5 Using Cache With Pagination/1.pptx
@@ -7,7 +7,10 @@
   <p:sldIdLst>
     <p:sldId id="402" r:id="rId2"/>
     <p:sldId id="403" r:id="rId3"/>
-    <p:sldId id="400" r:id="rId4"/>
+    <p:sldId id="404" r:id="rId4"/>
+    <p:sldId id="405" r:id="rId5"/>
+    <p:sldId id="406" r:id="rId6"/>
+    <p:sldId id="400" r:id="rId7"/>
   </p:sldIdLst>
   <p:sldSz cx="12192000" cy="6858000"/>
   <p:notesSz cx="6858000" cy="9144000"/>
@@ -261,7 +264,7 @@
           <a:p>
             <a:fld id="{3E102D2E-813C-461C-9963-687A650C48C0}" type="datetimeFigureOut">
               <a:rPr lang="en-US" smtClean="0"/>
-              <a:t>5/23/2025</a:t>
+              <a:t>5/29/2025</a:t>
             </a:fld>
             <a:endParaRPr lang="en-US"/>
           </a:p>
@@ -459,7 +462,7 @@
           <a:p>
             <a:fld id="{3E102D2E-813C-461C-9963-687A650C48C0}" type="datetimeFigureOut">
               <a:rPr lang="en-US" smtClean="0"/>
-              <a:t>5/23/2025</a:t>
+              <a:t>5/29/2025</a:t>
             </a:fld>
             <a:endParaRPr lang="en-US"/>
           </a:p>
@@ -667,7 +670,7 @@
           <a:p>
             <a:fld id="{3E102D2E-813C-461C-9963-687A650C48C0}" type="datetimeFigureOut">
               <a:rPr lang="en-US" smtClean="0"/>
-              <a:t>5/23/2025</a:t>
+              <a:t>5/29/2025</a:t>
             </a:fld>
             <a:endParaRPr lang="en-US"/>
           </a:p>
@@ -865,7 +868,7 @@
           <a:p>
             <a:fld id="{3E102D2E-813C-461C-9963-687A650C48C0}" type="datetimeFigureOut">
               <a:rPr lang="en-US" smtClean="0"/>
-              <a:t>5/23/2025</a:t>
+              <a:t>5/29/2025</a:t>
             </a:fld>
             <a:endParaRPr lang="en-US"/>
           </a:p>
@@ -1140,7 +1143,7 @@
           <a:p>
             <a:fld id="{3E102D2E-813C-461C-9963-687A650C48C0}" type="datetimeFigureOut">
               <a:rPr lang="en-US" smtClean="0"/>
-              <a:t>5/23/2025</a:t>
+              <a:t>5/29/2025</a:t>
             </a:fld>
             <a:endParaRPr lang="en-US"/>
           </a:p>
@@ -1405,7 +1408,7 @@
           <a:p>
             <a:fld id="{3E102D2E-813C-461C-9963-687A650C48C0}" type="datetimeFigureOut">
               <a:rPr lang="en-US" smtClean="0"/>
-              <a:t>5/23/2025</a:t>
+              <a:t>5/29/2025</a:t>
             </a:fld>
             <a:endParaRPr lang="en-US"/>
           </a:p>
@@ -1817,7 +1820,7 @@
           <a:p>
             <a:fld id="{3E102D2E-813C-461C-9963-687A650C48C0}" type="datetimeFigureOut">
               <a:rPr lang="en-US" smtClean="0"/>
-              <a:t>5/23/2025</a:t>
+              <a:t>5/29/2025</a:t>
             </a:fld>
             <a:endParaRPr lang="en-US"/>
           </a:p>
@@ -1958,7 +1961,7 @@
           <a:p>
             <a:fld id="{3E102D2E-813C-461C-9963-687A650C48C0}" type="datetimeFigureOut">
               <a:rPr lang="en-US" smtClean="0"/>
-              <a:t>5/23/2025</a:t>
+              <a:t>5/29/2025</a:t>
             </a:fld>
             <a:endParaRPr lang="en-US"/>
           </a:p>
@@ -2071,7 +2074,7 @@
           <a:p>
             <a:fld id="{3E102D2E-813C-461C-9963-687A650C48C0}" type="datetimeFigureOut">
               <a:rPr lang="en-US" smtClean="0"/>
-              <a:t>5/23/2025</a:t>
+              <a:t>5/29/2025</a:t>
             </a:fld>
             <a:endParaRPr lang="en-US"/>
           </a:p>
@@ -2382,7 +2385,7 @@
           <a:p>
             <a:fld id="{3E102D2E-813C-461C-9963-687A650C48C0}" type="datetimeFigureOut">
               <a:rPr lang="en-US" smtClean="0"/>
-              <a:t>5/23/2025</a:t>
+              <a:t>5/29/2025</a:t>
             </a:fld>
             <a:endParaRPr lang="en-US"/>
           </a:p>
@@ -2670,7 +2673,7 @@
           <a:p>
             <a:fld id="{3E102D2E-813C-461C-9963-687A650C48C0}" type="datetimeFigureOut">
               <a:rPr lang="en-US" smtClean="0"/>
-              <a:t>5/23/2025</a:t>
+              <a:t>5/29/2025</a:t>
             </a:fld>
             <a:endParaRPr lang="en-US"/>
           </a:p>
@@ -2911,7 +2914,7 @@
           <a:p>
             <a:fld id="{3E102D2E-813C-461C-9963-687A650C48C0}" type="datetimeFigureOut">
               <a:rPr lang="en-US" smtClean="0"/>
-              <a:t>5/23/2025</a:t>
+              <a:t>5/29/2025</a:t>
             </a:fld>
             <a:endParaRPr lang="en-US"/>
           </a:p>
@@ -3349,7 +3352,7 @@
         <p:spPr>
           <a:xfrm>
             <a:off x="217714" y="255046"/>
-            <a:ext cx="11756571" cy="355354"/>
+            <a:ext cx="11756571" cy="2756011"/>
           </a:xfrm>
           <a:prstGeom prst="rect">
             <a:avLst/>
@@ -3368,6 +3371,134 @@
               </a:lnSpc>
               <a:buNone/>
             </a:pPr>
+            <a:r>
+              <a:rPr lang="az-Latn-AZ" altLang="en-US" sz="1300">
+                <a:latin typeface="Arial" panose="020B0604020202020204" pitchFamily="34" charset="0"/>
+              </a:rPr>
+              <a:t>Bu dərs </a:t>
+            </a:r>
+            <a:r>
+              <a:rPr lang="az-Latn-AZ" altLang="en-US" sz="1300" b="1">
+                <a:solidFill>
+                  <a:srgbClr val="FF0000"/>
+                </a:solidFill>
+                <a:latin typeface="Arial" panose="020B0604020202020204" pitchFamily="34" charset="0"/>
+              </a:rPr>
+              <a:t>pagination</a:t>
+            </a:r>
+            <a:r>
+              <a:rPr lang="az-Latn-AZ" altLang="en-US" sz="1300">
+                <a:latin typeface="Arial" panose="020B0604020202020204" pitchFamily="34" charset="0"/>
+              </a:rPr>
+              <a:t> ilə </a:t>
+            </a:r>
+            <a:r>
+              <a:rPr lang="az-Latn-AZ" altLang="en-US" sz="1300" b="1">
+                <a:solidFill>
+                  <a:srgbClr val="FF0000"/>
+                </a:solidFill>
+                <a:latin typeface="Arial" panose="020B0604020202020204" pitchFamily="34" charset="0"/>
+              </a:rPr>
+              <a:t>cache</a:t>
+            </a:r>
+            <a:r>
+              <a:rPr lang="az-Latn-AZ" altLang="en-US" sz="1300">
+                <a:latin typeface="Arial" panose="020B0604020202020204" pitchFamily="34" charset="0"/>
+              </a:rPr>
+              <a:t> istifadəsində ən vacib anlayışlardan birinə toxunacağıq.</a:t>
+            </a:r>
+          </a:p>
+          <a:p>
+            <a:pPr>
+              <a:lnSpc>
+                <a:spcPct val="150000"/>
+              </a:lnSpc>
+              <a:buNone/>
+            </a:pPr>
+            <a:endParaRPr kumimoji="0" lang="az-Latn-AZ" altLang="en-US" sz="1300" b="0" i="0" u="none" strike="noStrike" cap="none" normalizeH="0" baseline="0">
+              <a:ln>
+                <a:noFill/>
+              </a:ln>
+              <a:solidFill>
+                <a:schemeClr val="tx1"/>
+              </a:solidFill>
+              <a:effectLst/>
+              <a:latin typeface="Arial" panose="020B0604020202020204" pitchFamily="34" charset="0"/>
+            </a:endParaRPr>
+          </a:p>
+          <a:p>
+            <a:pPr>
+              <a:lnSpc>
+                <a:spcPct val="150000"/>
+              </a:lnSpc>
+              <a:buNone/>
+            </a:pPr>
+            <a:endParaRPr lang="az-Latn-AZ" altLang="en-US" sz="1300">
+              <a:latin typeface="Arial" panose="020B0604020202020204" pitchFamily="34" charset="0"/>
+            </a:endParaRPr>
+          </a:p>
+          <a:p>
+            <a:pPr>
+              <a:lnSpc>
+                <a:spcPct val="150000"/>
+              </a:lnSpc>
+              <a:buNone/>
+            </a:pPr>
+            <a:r>
+              <a:rPr kumimoji="0" lang="en-US" altLang="en-US" sz="1300" b="1" i="0" u="none" strike="noStrike" cap="none" normalizeH="0" baseline="0">
+                <a:ln>
+                  <a:noFill/>
+                </a:ln>
+                <a:solidFill>
+                  <a:srgbClr val="FF0000"/>
+                </a:solidFill>
+                <a:effectLst/>
+                <a:latin typeface="Arial" panose="020B0604020202020204" pitchFamily="34" charset="0"/>
+              </a:rPr>
+              <a:t>Pagination ilə Cache necə işləyir?</a:t>
+            </a:r>
+            <a:endParaRPr kumimoji="0" lang="az-Latn-AZ" altLang="en-US" sz="1300" b="1" i="0" u="none" strike="noStrike" cap="none" normalizeH="0" baseline="0">
+              <a:ln>
+                <a:noFill/>
+              </a:ln>
+              <a:solidFill>
+                <a:srgbClr val="FF0000"/>
+              </a:solidFill>
+              <a:effectLst/>
+              <a:latin typeface="Arial" panose="020B0604020202020204" pitchFamily="34" charset="0"/>
+            </a:endParaRPr>
+          </a:p>
+          <a:p>
+            <a:pPr>
+              <a:lnSpc>
+                <a:spcPct val="150000"/>
+              </a:lnSpc>
+              <a:buNone/>
+            </a:pPr>
+            <a:endParaRPr lang="az-Latn-AZ" altLang="en-US" sz="1300">
+              <a:latin typeface="Arial" panose="020B0604020202020204" pitchFamily="34" charset="0"/>
+            </a:endParaRPr>
+          </a:p>
+          <a:p>
+            <a:pPr>
+              <a:lnSpc>
+                <a:spcPct val="150000"/>
+              </a:lnSpc>
+              <a:buNone/>
+            </a:pPr>
+            <a:r>
+              <a:rPr kumimoji="0" lang="en-US" altLang="en-US" sz="1300" b="1" i="0" u="none" strike="noStrike" cap="none" normalizeH="0" baseline="0">
+                <a:ln>
+                  <a:noFill/>
+                </a:ln>
+                <a:solidFill>
+                  <a:schemeClr val="tx1"/>
+                </a:solidFill>
+                <a:effectLst/>
+                <a:latin typeface="Arial" panose="020B0604020202020204" pitchFamily="34" charset="0"/>
+              </a:rPr>
+              <a:t>Pagination</a:t>
+            </a:r>
             <a:r>
               <a:rPr kumimoji="0" lang="en-US" altLang="en-US" sz="1300" b="0" i="0" u="none" strike="noStrike" cap="none" normalizeH="0" baseline="0">
                 <a:ln>
@@ -3379,7 +3510,119 @@
                 <a:effectLst/>
                 <a:latin typeface="Arial" panose="020B0604020202020204" pitchFamily="34" charset="0"/>
               </a:rPr>
-              <a:t>.</a:t>
+              <a:t>-da fərqli səhifələr (page 1, page 2, ...) fərqli məlumatlar göstəri</a:t>
+            </a:r>
+            <a:r>
+              <a:rPr kumimoji="0" lang="az-Latn-AZ" altLang="en-US" sz="1300" b="0" i="0" u="none" strike="noStrike" cap="none" normalizeH="0" baseline="0">
+                <a:ln>
+                  <a:noFill/>
+                </a:ln>
+                <a:solidFill>
+                  <a:schemeClr val="tx1"/>
+                </a:solidFill>
+                <a:effectLst/>
+                <a:latin typeface="Arial" panose="020B0604020202020204" pitchFamily="34" charset="0"/>
+              </a:rPr>
+              <a:t>lir</a:t>
+            </a:r>
+            <a:r>
+              <a:rPr kumimoji="0" lang="en-US" altLang="en-US" sz="1300" b="0" i="0" u="none" strike="noStrike" cap="none" normalizeH="0" baseline="0">
+                <a:ln>
+                  <a:noFill/>
+                </a:ln>
+                <a:solidFill>
+                  <a:schemeClr val="tx1"/>
+                </a:solidFill>
+                <a:effectLst/>
+                <a:latin typeface="Arial" panose="020B0604020202020204" pitchFamily="34" charset="0"/>
+              </a:rPr>
+              <a:t>. Ona görə də hər səhifənin özünəməxsus </a:t>
+            </a:r>
+            <a:r>
+              <a:rPr kumimoji="0" lang="en-US" altLang="en-US" sz="1300" b="1" i="0" u="none" strike="noStrike" cap="none" normalizeH="0" baseline="0">
+                <a:ln>
+                  <a:noFill/>
+                </a:ln>
+                <a:solidFill>
+                  <a:srgbClr val="00B050"/>
+                </a:solidFill>
+                <a:effectLst/>
+                <a:latin typeface="Arial" panose="020B0604020202020204" pitchFamily="34" charset="0"/>
+              </a:rPr>
+              <a:t>cache açarı (key) </a:t>
+            </a:r>
+            <a:r>
+              <a:rPr kumimoji="0" lang="en-US" altLang="en-US" sz="1300" b="0" i="0" u="none" strike="noStrike" cap="none" normalizeH="0" baseline="0">
+                <a:ln>
+                  <a:noFill/>
+                </a:ln>
+                <a:solidFill>
+                  <a:schemeClr val="tx1"/>
+                </a:solidFill>
+                <a:effectLst/>
+                <a:latin typeface="Arial" panose="020B0604020202020204" pitchFamily="34" charset="0"/>
+              </a:rPr>
+              <a:t>olmalıdır.</a:t>
+            </a:r>
+            <a:endParaRPr kumimoji="0" lang="az-Latn-AZ" altLang="en-US" sz="1300" b="0" i="0" u="none" strike="noStrike" cap="none" normalizeH="0" baseline="0">
+              <a:ln>
+                <a:noFill/>
+              </a:ln>
+              <a:solidFill>
+                <a:schemeClr val="tx1"/>
+              </a:solidFill>
+              <a:effectLst/>
+              <a:latin typeface="Arial" panose="020B0604020202020204" pitchFamily="34" charset="0"/>
+            </a:endParaRPr>
+          </a:p>
+          <a:p>
+            <a:pPr>
+              <a:lnSpc>
+                <a:spcPct val="150000"/>
+              </a:lnSpc>
+              <a:buNone/>
+            </a:pPr>
+            <a:endParaRPr lang="az-Latn-AZ" altLang="en-US" sz="1300">
+              <a:latin typeface="Arial" panose="020B0604020202020204" pitchFamily="34" charset="0"/>
+            </a:endParaRPr>
+          </a:p>
+          <a:p>
+            <a:pPr>
+              <a:lnSpc>
+                <a:spcPct val="150000"/>
+              </a:lnSpc>
+              <a:buNone/>
+            </a:pPr>
+            <a:endParaRPr kumimoji="0" lang="az-Latn-AZ" altLang="en-US" sz="1300" b="0" i="0" u="none" strike="noStrike" cap="none" normalizeH="0" baseline="0">
+              <a:ln>
+                <a:noFill/>
+              </a:ln>
+              <a:solidFill>
+                <a:schemeClr val="tx1"/>
+              </a:solidFill>
+              <a:effectLst/>
+              <a:latin typeface="Arial" panose="020B0604020202020204" pitchFamily="34" charset="0"/>
+            </a:endParaRPr>
+          </a:p>
+          <a:p>
+            <a:pPr>
+              <a:lnSpc>
+                <a:spcPct val="150000"/>
+              </a:lnSpc>
+              <a:buNone/>
+            </a:pPr>
+            <a:r>
+              <a:rPr kumimoji="0" lang="en-US" altLang="en-US" sz="1300" b="0" i="0" u="none" strike="noStrike" cap="none" normalizeH="0" baseline="0">
+                <a:ln>
+                  <a:noFill/>
+                </a:ln>
+                <a:solidFill>
+                  <a:schemeClr val="tx1"/>
+                </a:solidFill>
+                <a:effectLst/>
+                <a:latin typeface="Arial" panose="020B0604020202020204" pitchFamily="34" charset="0"/>
+              </a:rPr>
+              <a:t>Əgər bütün səhifələr eyni cache key ilə (posts) saxlanılsa, onda səhifə 1 üçün olan məlumatı səhifə 2-də də görərsiniz – bu yanlışdır.</a:t>
             </a:r>
           </a:p>
         </p:txBody>
@@ -3484,6 +3727,264 @@
 </file>
 
 <file path=ppt/slides/slide3.xml><?xml version="1.0" encoding="utf-8"?>
+<p:sld xmlns:a="http://schemas.openxmlformats.org/drawingml/2006/main" xmlns:r="http://schemas.openxmlformats.org/officeDocument/2006/relationships" xmlns:p="http://schemas.openxmlformats.org/presentationml/2006/main">
+  <p:cSld>
+    <p:spTree>
+      <p:nvGrpSpPr>
+        <p:cNvPr id="1" name="">
+          <a:extLst>
+            <a:ext uri="{FF2B5EF4-FFF2-40B4-BE49-F238E27FC236}">
+              <a16:creationId xmlns:a16="http://schemas.microsoft.com/office/drawing/2014/main" id="{8C929496-2721-C7B5-9219-C25A0735D879}"/>
+            </a:ext>
+          </a:extLst>
+        </p:cNvPr>
+        <p:cNvGrpSpPr/>
+        <p:nvPr/>
+      </p:nvGrpSpPr>
+      <p:grpSpPr>
+        <a:xfrm>
+          <a:off x="0" y="0"/>
+          <a:ext cx="0" cy="0"/>
+          <a:chOff x="0" y="0"/>
+          <a:chExt cx="0" cy="0"/>
+        </a:xfrm>
+      </p:grpSpPr>
+      <p:sp>
+        <p:nvSpPr>
+          <p:cNvPr id="3" name="TextBox 2">
+            <a:extLst>
+              <a:ext uri="{FF2B5EF4-FFF2-40B4-BE49-F238E27FC236}">
+                <a16:creationId xmlns:a16="http://schemas.microsoft.com/office/drawing/2014/main" id="{8CC45E20-3153-C9FB-3B68-A4892140E65B}"/>
+              </a:ext>
+            </a:extLst>
+          </p:cNvPr>
+          <p:cNvSpPr txBox="1"/>
+          <p:nvPr/>
+        </p:nvSpPr>
+        <p:spPr>
+          <a:xfrm>
+            <a:off x="217714" y="255046"/>
+            <a:ext cx="11756571" cy="355354"/>
+          </a:xfrm>
+          <a:prstGeom prst="rect">
+            <a:avLst/>
+          </a:prstGeom>
+          <a:noFill/>
+        </p:spPr>
+        <p:txBody>
+          <a:bodyPr wrap="square">
+            <a:spAutoFit/>
+          </a:bodyPr>
+          <a:lstStyle/>
+          <a:p>
+            <a:pPr>
+              <a:lnSpc>
+                <a:spcPct val="150000"/>
+              </a:lnSpc>
+              <a:buNone/>
+            </a:pPr>
+            <a:r>
+              <a:rPr kumimoji="0" lang="en-US" altLang="en-US" sz="1300" b="0" i="0" u="none" strike="noStrike" cap="none" normalizeH="0" baseline="0">
+                <a:ln>
+                  <a:noFill/>
+                </a:ln>
+                <a:solidFill>
+                  <a:schemeClr val="tx1"/>
+                </a:solidFill>
+                <a:effectLst/>
+                <a:latin typeface="Arial" panose="020B0604020202020204" pitchFamily="34" charset="0"/>
+              </a:rPr>
+              <a:t>.</a:t>
+            </a:r>
+          </a:p>
+        </p:txBody>
+      </p:sp>
+    </p:spTree>
+    <p:extLst>
+      <p:ext uri="{BB962C8B-B14F-4D97-AF65-F5344CB8AC3E}">
+        <p14:creationId xmlns:p14="http://schemas.microsoft.com/office/powerpoint/2010/main" val="951530924"/>
+      </p:ext>
+    </p:extLst>
+  </p:cSld>
+  <p:clrMapOvr>
+    <a:masterClrMapping/>
+  </p:clrMapOvr>
+</p:sld>
+</file>
+
+<file path=ppt/slides/slide4.xml><?xml version="1.0" encoding="utf-8"?>
+<p:sld xmlns:a="http://schemas.openxmlformats.org/drawingml/2006/main" xmlns:r="http://schemas.openxmlformats.org/officeDocument/2006/relationships" xmlns:p="http://schemas.openxmlformats.org/presentationml/2006/main">
+  <p:cSld>
+    <p:spTree>
+      <p:nvGrpSpPr>
+        <p:cNvPr id="1" name="">
+          <a:extLst>
+            <a:ext uri="{FF2B5EF4-FFF2-40B4-BE49-F238E27FC236}">
+              <a16:creationId xmlns:a16="http://schemas.microsoft.com/office/drawing/2014/main" id="{FF076312-3E8E-B631-0143-09F8286CE45B}"/>
+            </a:ext>
+          </a:extLst>
+        </p:cNvPr>
+        <p:cNvGrpSpPr/>
+        <p:nvPr/>
+      </p:nvGrpSpPr>
+      <p:grpSpPr>
+        <a:xfrm>
+          <a:off x="0" y="0"/>
+          <a:ext cx="0" cy="0"/>
+          <a:chOff x="0" y="0"/>
+          <a:chExt cx="0" cy="0"/>
+        </a:xfrm>
+      </p:grpSpPr>
+      <p:sp>
+        <p:nvSpPr>
+          <p:cNvPr id="3" name="TextBox 2">
+            <a:extLst>
+              <a:ext uri="{FF2B5EF4-FFF2-40B4-BE49-F238E27FC236}">
+                <a16:creationId xmlns:a16="http://schemas.microsoft.com/office/drawing/2014/main" id="{8E097A3B-3500-B6D8-016F-4B3C1AAFD9F1}"/>
+              </a:ext>
+            </a:extLst>
+          </p:cNvPr>
+          <p:cNvSpPr txBox="1"/>
+          <p:nvPr/>
+        </p:nvSpPr>
+        <p:spPr>
+          <a:xfrm>
+            <a:off x="217714" y="255046"/>
+            <a:ext cx="11756571" cy="355354"/>
+          </a:xfrm>
+          <a:prstGeom prst="rect">
+            <a:avLst/>
+          </a:prstGeom>
+          <a:noFill/>
+        </p:spPr>
+        <p:txBody>
+          <a:bodyPr wrap="square">
+            <a:spAutoFit/>
+          </a:bodyPr>
+          <a:lstStyle/>
+          <a:p>
+            <a:pPr>
+              <a:lnSpc>
+                <a:spcPct val="150000"/>
+              </a:lnSpc>
+              <a:buNone/>
+            </a:pPr>
+            <a:r>
+              <a:rPr kumimoji="0" lang="en-US" altLang="en-US" sz="1300" b="0" i="0" u="none" strike="noStrike" cap="none" normalizeH="0" baseline="0">
+                <a:ln>
+                  <a:noFill/>
+                </a:ln>
+                <a:solidFill>
+                  <a:schemeClr val="tx1"/>
+                </a:solidFill>
+                <a:effectLst/>
+                <a:latin typeface="Arial" panose="020B0604020202020204" pitchFamily="34" charset="0"/>
+              </a:rPr>
+              <a:t>.</a:t>
+            </a:r>
+          </a:p>
+        </p:txBody>
+      </p:sp>
+    </p:spTree>
+    <p:extLst>
+      <p:ext uri="{BB962C8B-B14F-4D97-AF65-F5344CB8AC3E}">
+        <p14:creationId xmlns:p14="http://schemas.microsoft.com/office/powerpoint/2010/main" val="2997606545"/>
+      </p:ext>
+    </p:extLst>
+  </p:cSld>
+  <p:clrMapOvr>
+    <a:masterClrMapping/>
+  </p:clrMapOvr>
+</p:sld>
+</file>
+
+<file path=ppt/slides/slide5.xml><?xml version="1.0" encoding="utf-8"?>
+<p:sld xmlns:a="http://schemas.openxmlformats.org/drawingml/2006/main" xmlns:r="http://schemas.openxmlformats.org/officeDocument/2006/relationships" xmlns:p="http://schemas.openxmlformats.org/presentationml/2006/main">
+  <p:cSld>
+    <p:spTree>
+      <p:nvGrpSpPr>
+        <p:cNvPr id="1" name="">
+          <a:extLst>
+            <a:ext uri="{FF2B5EF4-FFF2-40B4-BE49-F238E27FC236}">
+              <a16:creationId xmlns:a16="http://schemas.microsoft.com/office/drawing/2014/main" id="{3F94EF23-F2DE-E3D3-177D-DEEB4513E1F3}"/>
+            </a:ext>
+          </a:extLst>
+        </p:cNvPr>
+        <p:cNvGrpSpPr/>
+        <p:nvPr/>
+      </p:nvGrpSpPr>
+      <p:grpSpPr>
+        <a:xfrm>
+          <a:off x="0" y="0"/>
+          <a:ext cx="0" cy="0"/>
+          <a:chOff x="0" y="0"/>
+          <a:chExt cx="0" cy="0"/>
+        </a:xfrm>
+      </p:grpSpPr>
+      <p:sp>
+        <p:nvSpPr>
+          <p:cNvPr id="3" name="TextBox 2">
+            <a:extLst>
+              <a:ext uri="{FF2B5EF4-FFF2-40B4-BE49-F238E27FC236}">
+                <a16:creationId xmlns:a16="http://schemas.microsoft.com/office/drawing/2014/main" id="{3C0FF7B9-8C7E-4002-E180-FEE70462973C}"/>
+              </a:ext>
+            </a:extLst>
+          </p:cNvPr>
+          <p:cNvSpPr txBox="1"/>
+          <p:nvPr/>
+        </p:nvSpPr>
+        <p:spPr>
+          <a:xfrm>
+            <a:off x="217714" y="255046"/>
+            <a:ext cx="11756571" cy="355354"/>
+          </a:xfrm>
+          <a:prstGeom prst="rect">
+            <a:avLst/>
+          </a:prstGeom>
+          <a:noFill/>
+        </p:spPr>
+        <p:txBody>
+          <a:bodyPr wrap="square">
+            <a:spAutoFit/>
+          </a:bodyPr>
+          <a:lstStyle/>
+          <a:p>
+            <a:pPr>
+              <a:lnSpc>
+                <a:spcPct val="150000"/>
+              </a:lnSpc>
+              <a:buNone/>
+            </a:pPr>
+            <a:r>
+              <a:rPr kumimoji="0" lang="en-US" altLang="en-US" sz="1300" b="0" i="0" u="none" strike="noStrike" cap="none" normalizeH="0" baseline="0">
+                <a:ln>
+                  <a:noFill/>
+                </a:ln>
+                <a:solidFill>
+                  <a:schemeClr val="tx1"/>
+                </a:solidFill>
+                <a:effectLst/>
+                <a:latin typeface="Arial" panose="020B0604020202020204" pitchFamily="34" charset="0"/>
+              </a:rPr>
+              <a:t>.</a:t>
+            </a:r>
+          </a:p>
+        </p:txBody>
+      </p:sp>
+    </p:spTree>
+    <p:extLst>
+      <p:ext uri="{BB962C8B-B14F-4D97-AF65-F5344CB8AC3E}">
+        <p14:creationId xmlns:p14="http://schemas.microsoft.com/office/powerpoint/2010/main" val="3442280577"/>
+      </p:ext>
+    </p:extLst>
+  </p:cSld>
+  <p:clrMapOvr>
+    <a:masterClrMapping/>
+  </p:clrMapOvr>
+</p:sld>
+</file>
+
+<file path=ppt/slides/slide6.xml><?xml version="1.0" encoding="utf-8"?>
 <p:sld xmlns:a="http://schemas.openxmlformats.org/drawingml/2006/main" xmlns:r="http://schemas.openxmlformats.org/officeDocument/2006/relationships" xmlns:p="http://schemas.openxmlformats.org/presentationml/2006/main">
   <p:cSld>
     <p:spTree>

--- a/.lessons/26 Fundamental Cache/5 Using Cache With Pagination/1.pptx
+++ b/.lessons/26 Fundamental Cache/5 Using Cache With Pagination/1.pptx
@@ -3352,7 +3352,7 @@
         <p:spPr>
           <a:xfrm>
             <a:off x="217714" y="255046"/>
-            <a:ext cx="11756571" cy="2756011"/>
+            <a:ext cx="11756571" cy="2155847"/>
           </a:xfrm>
           <a:prstGeom prst="rect">
             <a:avLst/>
@@ -3564,53 +3564,12 @@
               </a:rPr>
               <a:t>olmalıdır.</a:t>
             </a:r>
-            <a:endParaRPr kumimoji="0" lang="az-Latn-AZ" altLang="en-US" sz="1300" b="0" i="0" u="none" strike="noStrike" cap="none" normalizeH="0" baseline="0">
-              <a:ln>
-                <a:noFill/>
-              </a:ln>
-              <a:solidFill>
-                <a:schemeClr val="tx1"/>
-              </a:solidFill>
-              <a:effectLst/>
-              <a:latin typeface="Arial" panose="020B0604020202020204" pitchFamily="34" charset="0"/>
-            </a:endParaRPr>
-          </a:p>
-          <a:p>
-            <a:pPr>
-              <a:lnSpc>
-                <a:spcPct val="150000"/>
-              </a:lnSpc>
-              <a:buNone/>
-            </a:pPr>
-            <a:endParaRPr lang="az-Latn-AZ" altLang="en-US" sz="1300">
-              <a:latin typeface="Arial" panose="020B0604020202020204" pitchFamily="34" charset="0"/>
-            </a:endParaRPr>
-          </a:p>
-          <a:p>
-            <a:pPr>
-              <a:lnSpc>
-                <a:spcPct val="150000"/>
-              </a:lnSpc>
-              <a:buNone/>
-            </a:pPr>
-            <a:endParaRPr kumimoji="0" lang="az-Latn-AZ" altLang="en-US" sz="1300" b="0" i="0" u="none" strike="noStrike" cap="none" normalizeH="0" baseline="0">
-              <a:ln>
-                <a:noFill/>
-              </a:ln>
-              <a:solidFill>
-                <a:schemeClr val="tx1"/>
-              </a:solidFill>
-              <a:effectLst/>
-              <a:latin typeface="Arial" panose="020B0604020202020204" pitchFamily="34" charset="0"/>
-            </a:endParaRPr>
-          </a:p>
-          <a:p>
-            <a:pPr>
-              <a:lnSpc>
-                <a:spcPct val="150000"/>
-              </a:lnSpc>
-              <a:buNone/>
-            </a:pPr>
+            <a:r>
+              <a:rPr lang="az-Latn-AZ" altLang="en-US" sz="1300">
+                <a:latin typeface="Arial" panose="020B0604020202020204" pitchFamily="34" charset="0"/>
+              </a:rPr>
+              <a:t> </a:t>
+            </a:r>
             <a:r>
               <a:rPr kumimoji="0" lang="en-US" altLang="en-US" sz="1300" b="0" i="0" u="none" strike="noStrike" cap="none" normalizeH="0" baseline="0">
                 <a:ln>
@@ -3622,11 +3581,119 @@
                 <a:effectLst/>
                 <a:latin typeface="Arial" panose="020B0604020202020204" pitchFamily="34" charset="0"/>
               </a:rPr>
-              <a:t>Əgər bütün səhifələr eyni cache key ilə (posts) saxlanılsa, onda səhifə 1 üçün olan məlumatı səhifə 2-də də görərsiniz – bu yanlışdır.</a:t>
-            </a:r>
-          </a:p>
-        </p:txBody>
-      </p:sp>
+              <a:t>Əgər bütün səhifələr eyni </a:t>
+            </a:r>
+            <a:r>
+              <a:rPr kumimoji="0" lang="en-US" altLang="en-US" sz="1300" b="1" i="0" u="none" strike="noStrike" cap="none" normalizeH="0" baseline="0">
+                <a:ln>
+                  <a:noFill/>
+                </a:ln>
+                <a:solidFill>
+                  <a:schemeClr val="tx1"/>
+                </a:solidFill>
+                <a:effectLst/>
+                <a:latin typeface="Arial" panose="020B0604020202020204" pitchFamily="34" charset="0"/>
+              </a:rPr>
+              <a:t>cache key </a:t>
+            </a:r>
+            <a:r>
+              <a:rPr kumimoji="0" lang="en-US" altLang="en-US" sz="1300" b="0" i="0" u="none" strike="noStrike" cap="none" normalizeH="0" baseline="0">
+                <a:ln>
+                  <a:noFill/>
+                </a:ln>
+                <a:solidFill>
+                  <a:schemeClr val="tx1"/>
+                </a:solidFill>
+                <a:effectLst/>
+                <a:latin typeface="Arial" panose="020B0604020202020204" pitchFamily="34" charset="0"/>
+              </a:rPr>
+              <a:t>ilə (posts) saxlanılsa, onda səhifə </a:t>
+            </a:r>
+            <a:r>
+              <a:rPr kumimoji="0" lang="en-US" altLang="en-US" sz="1300" b="1" i="0" u="none" strike="noStrike" cap="none" normalizeH="0" baseline="0">
+                <a:ln>
+                  <a:noFill/>
+                </a:ln>
+                <a:solidFill>
+                  <a:schemeClr val="tx1"/>
+                </a:solidFill>
+                <a:effectLst/>
+                <a:latin typeface="Arial" panose="020B0604020202020204" pitchFamily="34" charset="0"/>
+              </a:rPr>
+              <a:t>1 </a:t>
+            </a:r>
+            <a:r>
+              <a:rPr kumimoji="0" lang="en-US" altLang="en-US" sz="1300" b="0" i="0" u="none" strike="noStrike" cap="none" normalizeH="0" baseline="0">
+                <a:ln>
+                  <a:noFill/>
+                </a:ln>
+                <a:solidFill>
+                  <a:schemeClr val="tx1"/>
+                </a:solidFill>
+                <a:effectLst/>
+                <a:latin typeface="Arial" panose="020B0604020202020204" pitchFamily="34" charset="0"/>
+              </a:rPr>
+              <a:t>üçün olan məlumatı səhifə </a:t>
+            </a:r>
+            <a:r>
+              <a:rPr kumimoji="0" lang="en-US" altLang="en-US" sz="1300" b="1" i="0" u="none" strike="noStrike" cap="none" normalizeH="0" baseline="0">
+                <a:ln>
+                  <a:noFill/>
+                </a:ln>
+                <a:solidFill>
+                  <a:schemeClr val="tx1"/>
+                </a:solidFill>
+                <a:effectLst/>
+                <a:latin typeface="Arial" panose="020B0604020202020204" pitchFamily="34" charset="0"/>
+              </a:rPr>
+              <a:t>2</a:t>
+            </a:r>
+            <a:r>
+              <a:rPr kumimoji="0" lang="en-US" altLang="en-US" sz="1300" b="0" i="0" u="none" strike="noStrike" cap="none" normalizeH="0" baseline="0">
+                <a:ln>
+                  <a:noFill/>
+                </a:ln>
+                <a:solidFill>
+                  <a:schemeClr val="tx1"/>
+                </a:solidFill>
+                <a:effectLst/>
+                <a:latin typeface="Arial" panose="020B0604020202020204" pitchFamily="34" charset="0"/>
+              </a:rPr>
+              <a:t>-də də görərsiniz – bu yanlışdır.</a:t>
+            </a:r>
+          </a:p>
+        </p:txBody>
+      </p:sp>
+      <p:pic>
+        <p:nvPicPr>
+          <p:cNvPr id="8" name="Picture 7">
+            <a:extLst>
+              <a:ext uri="{FF2B5EF4-FFF2-40B4-BE49-F238E27FC236}">
+                <a16:creationId xmlns:a16="http://schemas.microsoft.com/office/drawing/2014/main" id="{4F461B93-FEF5-880D-1809-89A507F3B0AF}"/>
+              </a:ext>
+            </a:extLst>
+          </p:cNvPr>
+          <p:cNvPicPr>
+            <a:picLocks noChangeAspect="1"/>
+          </p:cNvPicPr>
+          <p:nvPr/>
+        </p:nvPicPr>
+        <p:blipFill>
+          <a:blip r:embed="rId2"/>
+          <a:stretch>
+            <a:fillRect/>
+          </a:stretch>
+        </p:blipFill>
+        <p:spPr>
+          <a:xfrm>
+            <a:off x="5425112" y="2950590"/>
+            <a:ext cx="6766887" cy="3907410"/>
+          </a:xfrm>
+          <a:prstGeom prst="rect">
+            <a:avLst/>
+          </a:prstGeom>
+        </p:spPr>
+      </p:pic>
     </p:spTree>
     <p:extLst>
       <p:ext uri="{BB962C8B-B14F-4D97-AF65-F5344CB8AC3E}">
@@ -3678,7 +3745,7 @@
         <p:spPr>
           <a:xfrm>
             <a:off x="217714" y="255046"/>
-            <a:ext cx="11756571" cy="355354"/>
+            <a:ext cx="11756571" cy="5156668"/>
           </a:xfrm>
           <a:prstGeom prst="rect">
             <a:avLst/>
@@ -3697,6 +3764,53 @@
               </a:lnSpc>
               <a:buNone/>
             </a:pPr>
+            <a:endParaRPr kumimoji="0" lang="az-Latn-AZ" altLang="en-US" sz="1300" b="0" i="0" u="none" strike="noStrike" cap="none" normalizeH="0" baseline="0">
+              <a:ln>
+                <a:noFill/>
+              </a:ln>
+              <a:solidFill>
+                <a:schemeClr val="tx1"/>
+              </a:solidFill>
+              <a:effectLst/>
+              <a:latin typeface="Arial" panose="020B0604020202020204" pitchFamily="34" charset="0"/>
+            </a:endParaRPr>
+          </a:p>
+          <a:p>
+            <a:pPr>
+              <a:lnSpc>
+                <a:spcPct val="150000"/>
+              </a:lnSpc>
+              <a:buNone/>
+            </a:pPr>
+            <a:endParaRPr lang="az-Latn-AZ" altLang="en-US" sz="1300">
+              <a:latin typeface="Arial" panose="020B0604020202020204" pitchFamily="34" charset="0"/>
+            </a:endParaRPr>
+          </a:p>
+          <a:p>
+            <a:pPr>
+              <a:lnSpc>
+                <a:spcPct val="150000"/>
+              </a:lnSpc>
+              <a:buNone/>
+            </a:pPr>
+            <a:endParaRPr kumimoji="0" lang="az-Latn-AZ" altLang="en-US" sz="1300" b="0" i="0" u="none" strike="noStrike" cap="none" normalizeH="0" baseline="0">
+              <a:ln>
+                <a:noFill/>
+              </a:ln>
+              <a:solidFill>
+                <a:schemeClr val="tx1"/>
+              </a:solidFill>
+              <a:effectLst/>
+              <a:latin typeface="Arial" panose="020B0604020202020204" pitchFamily="34" charset="0"/>
+            </a:endParaRPr>
+          </a:p>
+          <a:p>
+            <a:pPr>
+              <a:lnSpc>
+                <a:spcPct val="150000"/>
+              </a:lnSpc>
+              <a:buNone/>
+            </a:pPr>
             <a:r>
               <a:rPr kumimoji="0" lang="en-US" altLang="en-US" sz="1300" b="0" i="0" u="none" strike="noStrike" cap="none" normalizeH="0" baseline="0">
                 <a:ln>
@@ -3708,11 +3822,534 @@
                 <a:effectLst/>
                 <a:latin typeface="Arial" panose="020B0604020202020204" pitchFamily="34" charset="0"/>
               </a:rPr>
-              <a:t>.</a:t>
-            </a:r>
-          </a:p>
-        </p:txBody>
-      </p:sp>
+              <a:t>Gəlin bu hissəni 4 sualda təhlil edək:</a:t>
+            </a:r>
+            <a:endParaRPr kumimoji="0" lang="az-Latn-AZ" altLang="en-US" sz="1300" b="0" i="0" u="none" strike="noStrike" cap="none" normalizeH="0" baseline="0">
+              <a:ln>
+                <a:noFill/>
+              </a:ln>
+              <a:solidFill>
+                <a:schemeClr val="tx1"/>
+              </a:solidFill>
+              <a:effectLst/>
+              <a:latin typeface="Arial" panose="020B0604020202020204" pitchFamily="34" charset="0"/>
+            </a:endParaRPr>
+          </a:p>
+          <a:p>
+            <a:pPr>
+              <a:lnSpc>
+                <a:spcPct val="150000"/>
+              </a:lnSpc>
+              <a:buNone/>
+            </a:pPr>
+            <a:endParaRPr lang="az-Latn-AZ" altLang="en-US" sz="1300">
+              <a:latin typeface="Arial" panose="020B0604020202020204" pitchFamily="34" charset="0"/>
+            </a:endParaRPr>
+          </a:p>
+          <a:p>
+            <a:pPr>
+              <a:lnSpc>
+                <a:spcPct val="150000"/>
+              </a:lnSpc>
+              <a:buNone/>
+            </a:pPr>
+            <a:r>
+              <a:rPr kumimoji="0" lang="fr-FR" altLang="en-US" sz="1300" b="0" i="0" u="none" strike="noStrike" cap="none" normalizeH="0" baseline="0">
+                <a:ln>
+                  <a:noFill/>
+                </a:ln>
+                <a:solidFill>
+                  <a:schemeClr val="tx1"/>
+                </a:solidFill>
+                <a:effectLst/>
+                <a:latin typeface="Arial" panose="020B0604020202020204" pitchFamily="34" charset="0"/>
+              </a:rPr>
+              <a:t>1) </a:t>
+            </a:r>
+            <a:r>
+              <a:rPr kumimoji="0" lang="fr-FR" altLang="en-US" sz="1300" b="1" i="0" u="none" strike="noStrike" cap="none" normalizeH="0" baseline="0">
+                <a:ln>
+                  <a:noFill/>
+                </a:ln>
+                <a:solidFill>
+                  <a:srgbClr val="00B050"/>
+                </a:solidFill>
+                <a:effectLst/>
+                <a:latin typeface="Arial" panose="020B0604020202020204" pitchFamily="34" charset="0"/>
+              </a:rPr>
+              <a:t>posts-page-'.request('page', 1) </a:t>
+            </a:r>
+            <a:r>
+              <a:rPr kumimoji="0" lang="fr-FR" altLang="en-US" sz="1300" b="0" i="0" u="none" strike="noStrike" cap="none" normalizeH="0" baseline="0">
+                <a:ln>
+                  <a:noFill/>
+                </a:ln>
+                <a:solidFill>
+                  <a:schemeClr val="tx1"/>
+                </a:solidFill>
+                <a:effectLst/>
+                <a:latin typeface="Arial" panose="020B0604020202020204" pitchFamily="34" charset="0"/>
+              </a:rPr>
+              <a:t>nədir?</a:t>
+            </a:r>
+            <a:endParaRPr kumimoji="0" lang="az-Latn-AZ" altLang="en-US" sz="1300" b="0" i="0" u="none" strike="noStrike" cap="none" normalizeH="0" baseline="0">
+              <a:ln>
+                <a:noFill/>
+              </a:ln>
+              <a:solidFill>
+                <a:schemeClr val="tx1"/>
+              </a:solidFill>
+              <a:effectLst/>
+              <a:latin typeface="Arial" panose="020B0604020202020204" pitchFamily="34" charset="0"/>
+            </a:endParaRPr>
+          </a:p>
+          <a:p>
+            <a:pPr>
+              <a:lnSpc>
+                <a:spcPct val="150000"/>
+              </a:lnSpc>
+              <a:buNone/>
+            </a:pPr>
+            <a:endParaRPr kumimoji="0" lang="az-Latn-AZ" altLang="en-US" sz="1300" b="0" i="0" u="none" strike="noStrike" cap="none" normalizeH="0" baseline="0">
+              <a:ln>
+                <a:noFill/>
+              </a:ln>
+              <a:solidFill>
+                <a:schemeClr val="tx1"/>
+              </a:solidFill>
+              <a:effectLst/>
+              <a:latin typeface="Arial" panose="020B0604020202020204" pitchFamily="34" charset="0"/>
+            </a:endParaRPr>
+          </a:p>
+          <a:p>
+            <a:pPr>
+              <a:lnSpc>
+                <a:spcPct val="150000"/>
+              </a:lnSpc>
+              <a:buNone/>
+            </a:pPr>
+            <a:r>
+              <a:rPr kumimoji="0" lang="en-US" altLang="en-US" sz="1300" b="0" i="0" u="none" strike="noStrike" cap="none" normalizeH="0" baseline="0">
+                <a:ln>
+                  <a:noFill/>
+                </a:ln>
+                <a:solidFill>
+                  <a:schemeClr val="tx1"/>
+                </a:solidFill>
+                <a:effectLst/>
+                <a:latin typeface="Arial" panose="020B0604020202020204" pitchFamily="34" charset="0"/>
+              </a:rPr>
+              <a:t>Bu, </a:t>
+            </a:r>
+            <a:r>
+              <a:rPr kumimoji="0" lang="en-US" altLang="en-US" sz="1300" b="1" i="0" u="none" strike="noStrike" cap="none" normalizeH="0" baseline="0">
+                <a:ln>
+                  <a:noFill/>
+                </a:ln>
+                <a:solidFill>
+                  <a:schemeClr val="tx1"/>
+                </a:solidFill>
+                <a:effectLst/>
+                <a:latin typeface="Arial" panose="020B0604020202020204" pitchFamily="34" charset="0"/>
+              </a:rPr>
+              <a:t>cache</a:t>
+            </a:r>
+            <a:r>
+              <a:rPr kumimoji="0" lang="en-US" altLang="en-US" sz="1300" b="0" i="0" u="none" strike="noStrike" cap="none" normalizeH="0" baseline="0">
+                <a:ln>
+                  <a:noFill/>
+                </a:ln>
+                <a:solidFill>
+                  <a:schemeClr val="tx1"/>
+                </a:solidFill>
+                <a:effectLst/>
+                <a:latin typeface="Arial" panose="020B0604020202020204" pitchFamily="34" charset="0"/>
+              </a:rPr>
+              <a:t> üçün unikal açar (</a:t>
+            </a:r>
+            <a:r>
+              <a:rPr kumimoji="0" lang="en-US" altLang="en-US" sz="1300" b="1" i="0" u="none" strike="noStrike" cap="none" normalizeH="0" baseline="0">
+                <a:ln>
+                  <a:noFill/>
+                </a:ln>
+                <a:solidFill>
+                  <a:schemeClr val="tx1"/>
+                </a:solidFill>
+                <a:effectLst/>
+                <a:latin typeface="Arial" panose="020B0604020202020204" pitchFamily="34" charset="0"/>
+              </a:rPr>
+              <a:t>key</a:t>
+            </a:r>
+            <a:r>
+              <a:rPr kumimoji="0" lang="en-US" altLang="en-US" sz="1300" b="0" i="0" u="none" strike="noStrike" cap="none" normalizeH="0" baseline="0">
+                <a:ln>
+                  <a:noFill/>
+                </a:ln>
+                <a:solidFill>
+                  <a:schemeClr val="tx1"/>
+                </a:solidFill>
+                <a:effectLst/>
+                <a:latin typeface="Arial" panose="020B0604020202020204" pitchFamily="34" charset="0"/>
+              </a:rPr>
+              <a:t>) yaradır. Əgər </a:t>
+            </a:r>
+            <a:r>
+              <a:rPr kumimoji="0" lang="en-US" altLang="en-US" sz="1300" b="1" i="0" u="none" strike="noStrike" cap="none" normalizeH="0" baseline="0">
+                <a:ln>
+                  <a:noFill/>
+                </a:ln>
+                <a:solidFill>
+                  <a:schemeClr val="tx1"/>
+                </a:solidFill>
+                <a:effectLst/>
+                <a:latin typeface="Arial" panose="020B0604020202020204" pitchFamily="34" charset="0"/>
+              </a:rPr>
+              <a:t>URL</a:t>
+            </a:r>
+            <a:r>
+              <a:rPr kumimoji="0" lang="en-US" altLang="en-US" sz="1300" b="0" i="0" u="none" strike="noStrike" cap="none" normalizeH="0" baseline="0">
+                <a:ln>
+                  <a:noFill/>
+                </a:ln>
+                <a:solidFill>
+                  <a:schemeClr val="tx1"/>
+                </a:solidFill>
+                <a:effectLst/>
+                <a:latin typeface="Arial" panose="020B0604020202020204" pitchFamily="34" charset="0"/>
+              </a:rPr>
+              <a:t>-də </a:t>
+            </a:r>
+            <a:r>
+              <a:rPr kumimoji="0" lang="en-US" altLang="en-US" sz="1300" b="1" i="0" u="none" strike="noStrike" cap="none" normalizeH="0" baseline="0">
+                <a:ln>
+                  <a:noFill/>
+                </a:ln>
+                <a:solidFill>
+                  <a:schemeClr val="tx1"/>
+                </a:solidFill>
+                <a:effectLst/>
+                <a:latin typeface="Arial" panose="020B0604020202020204" pitchFamily="34" charset="0"/>
+              </a:rPr>
+              <a:t>/index?page=2 </a:t>
+            </a:r>
+            <a:r>
+              <a:rPr kumimoji="0" lang="en-US" altLang="en-US" sz="1300" b="0" i="0" u="none" strike="noStrike" cap="none" normalizeH="0" baseline="0">
+                <a:ln>
+                  <a:noFill/>
+                </a:ln>
+                <a:solidFill>
+                  <a:schemeClr val="tx1"/>
+                </a:solidFill>
+                <a:effectLst/>
+                <a:latin typeface="Arial" panose="020B0604020202020204" pitchFamily="34" charset="0"/>
+              </a:rPr>
+              <a:t>varsa, o zaman bu kod aşağıdakı kimi işləyir:</a:t>
+            </a:r>
+            <a:endParaRPr kumimoji="0" lang="az-Latn-AZ" altLang="en-US" sz="1300" b="0" i="0" u="none" strike="noStrike" cap="none" normalizeH="0" baseline="0">
+              <a:ln>
+                <a:noFill/>
+              </a:ln>
+              <a:solidFill>
+                <a:schemeClr val="tx1"/>
+              </a:solidFill>
+              <a:effectLst/>
+              <a:latin typeface="Arial" panose="020B0604020202020204" pitchFamily="34" charset="0"/>
+            </a:endParaRPr>
+          </a:p>
+          <a:p>
+            <a:pPr>
+              <a:lnSpc>
+                <a:spcPct val="150000"/>
+              </a:lnSpc>
+              <a:buNone/>
+            </a:pPr>
+            <a:endParaRPr lang="az-Latn-AZ" altLang="en-US" sz="1300">
+              <a:latin typeface="Arial" panose="020B0604020202020204" pitchFamily="34" charset="0"/>
+            </a:endParaRPr>
+          </a:p>
+          <a:p>
+            <a:pPr>
+              <a:lnSpc>
+                <a:spcPct val="150000"/>
+              </a:lnSpc>
+              <a:buNone/>
+            </a:pPr>
+            <a:endParaRPr kumimoji="0" lang="az-Latn-AZ" altLang="en-US" sz="1300" b="0" i="0" u="none" strike="noStrike" cap="none" normalizeH="0" baseline="0">
+              <a:ln>
+                <a:noFill/>
+              </a:ln>
+              <a:solidFill>
+                <a:schemeClr val="tx1"/>
+              </a:solidFill>
+              <a:effectLst/>
+              <a:latin typeface="Arial" panose="020B0604020202020204" pitchFamily="34" charset="0"/>
+            </a:endParaRPr>
+          </a:p>
+          <a:p>
+            <a:pPr>
+              <a:lnSpc>
+                <a:spcPct val="150000"/>
+              </a:lnSpc>
+              <a:buNone/>
+            </a:pPr>
+            <a:endParaRPr lang="az-Latn-AZ" altLang="en-US" sz="1300">
+              <a:latin typeface="Arial" panose="020B0604020202020204" pitchFamily="34" charset="0"/>
+            </a:endParaRPr>
+          </a:p>
+          <a:p>
+            <a:pPr>
+              <a:lnSpc>
+                <a:spcPct val="150000"/>
+              </a:lnSpc>
+              <a:buNone/>
+            </a:pPr>
+            <a:endParaRPr kumimoji="0" lang="az-Latn-AZ" altLang="en-US" sz="1300" b="0" i="0" u="none" strike="noStrike" cap="none" normalizeH="0" baseline="0">
+              <a:ln>
+                <a:noFill/>
+              </a:ln>
+              <a:solidFill>
+                <a:schemeClr val="tx1"/>
+              </a:solidFill>
+              <a:effectLst/>
+              <a:latin typeface="Arial" panose="020B0604020202020204" pitchFamily="34" charset="0"/>
+            </a:endParaRPr>
+          </a:p>
+          <a:p>
+            <a:pPr>
+              <a:lnSpc>
+                <a:spcPct val="150000"/>
+              </a:lnSpc>
+              <a:buNone/>
+            </a:pPr>
+            <a:r>
+              <a:rPr kumimoji="0" lang="en-US" altLang="en-US" sz="1300" b="0" i="0" u="none" strike="noStrike" cap="none" normalizeH="0" baseline="0">
+                <a:ln>
+                  <a:noFill/>
+                </a:ln>
+                <a:solidFill>
+                  <a:schemeClr val="tx1"/>
+                </a:solidFill>
+                <a:effectLst/>
+                <a:latin typeface="Arial" panose="020B0604020202020204" pitchFamily="34" charset="0"/>
+              </a:rPr>
+              <a:t>Bu şəkildə hər səhifənin öz </a:t>
+            </a:r>
+            <a:r>
+              <a:rPr kumimoji="0" lang="en-US" altLang="en-US" sz="1300" b="1" i="0" u="none" strike="noStrike" cap="none" normalizeH="0" baseline="0">
+                <a:ln>
+                  <a:noFill/>
+                </a:ln>
+                <a:solidFill>
+                  <a:schemeClr val="tx1"/>
+                </a:solidFill>
+                <a:effectLst/>
+                <a:latin typeface="Arial" panose="020B0604020202020204" pitchFamily="34" charset="0"/>
+              </a:rPr>
+              <a:t>cache</a:t>
+            </a:r>
+            <a:r>
+              <a:rPr kumimoji="0" lang="en-US" altLang="en-US" sz="1300" b="0" i="0" u="none" strike="noStrike" cap="none" normalizeH="0" baseline="0">
+                <a:ln>
+                  <a:noFill/>
+                </a:ln>
+                <a:solidFill>
+                  <a:schemeClr val="tx1"/>
+                </a:solidFill>
+                <a:effectLst/>
+                <a:latin typeface="Arial" panose="020B0604020202020204" pitchFamily="34" charset="0"/>
+              </a:rPr>
+              <a:t> açarı olur:</a:t>
+            </a:r>
+            <a:endParaRPr kumimoji="0" lang="az-Latn-AZ" altLang="en-US" sz="1300" b="0" i="0" u="none" strike="noStrike" cap="none" normalizeH="0" baseline="0">
+              <a:ln>
+                <a:noFill/>
+              </a:ln>
+              <a:solidFill>
+                <a:schemeClr val="tx1"/>
+              </a:solidFill>
+              <a:effectLst/>
+              <a:latin typeface="Arial" panose="020B0604020202020204" pitchFamily="34" charset="0"/>
+            </a:endParaRPr>
+          </a:p>
+          <a:p>
+            <a:pPr marL="285750" indent="-285750">
+              <a:lnSpc>
+                <a:spcPct val="150000"/>
+              </a:lnSpc>
+              <a:buFont typeface="Arial" panose="020B0604020202020204" pitchFamily="34" charset="0"/>
+              <a:buChar char="•"/>
+            </a:pPr>
+            <a:r>
+              <a:rPr kumimoji="0" lang="en-US" altLang="en-US" sz="1300" b="0" i="0" u="none" strike="noStrike" cap="none" normalizeH="0" baseline="0">
+                <a:ln>
+                  <a:noFill/>
+                </a:ln>
+                <a:solidFill>
+                  <a:schemeClr val="tx1"/>
+                </a:solidFill>
+                <a:effectLst/>
+                <a:latin typeface="Arial" panose="020B0604020202020204" pitchFamily="34" charset="0"/>
+              </a:rPr>
+              <a:t>posts-page-1</a:t>
+            </a:r>
+            <a:endParaRPr kumimoji="0" lang="az-Latn-AZ" altLang="en-US" sz="1300" b="0" i="0" u="none" strike="noStrike" cap="none" normalizeH="0" baseline="0">
+              <a:ln>
+                <a:noFill/>
+              </a:ln>
+              <a:solidFill>
+                <a:schemeClr val="tx1"/>
+              </a:solidFill>
+              <a:effectLst/>
+              <a:latin typeface="Arial" panose="020B0604020202020204" pitchFamily="34" charset="0"/>
+            </a:endParaRPr>
+          </a:p>
+          <a:p>
+            <a:pPr marL="285750" indent="-285750">
+              <a:lnSpc>
+                <a:spcPct val="150000"/>
+              </a:lnSpc>
+              <a:buFont typeface="Arial" panose="020B0604020202020204" pitchFamily="34" charset="0"/>
+              <a:buChar char="•"/>
+            </a:pPr>
+            <a:r>
+              <a:rPr kumimoji="0" lang="en-US" altLang="en-US" sz="1300" b="0" i="0" u="none" strike="noStrike" cap="none" normalizeH="0" baseline="0">
+                <a:ln>
+                  <a:noFill/>
+                </a:ln>
+                <a:solidFill>
+                  <a:schemeClr val="tx1"/>
+                </a:solidFill>
+                <a:effectLst/>
+                <a:latin typeface="Arial" panose="020B0604020202020204" pitchFamily="34" charset="0"/>
+              </a:rPr>
+              <a:t>posts-page-2</a:t>
+            </a:r>
+            <a:endParaRPr kumimoji="0" lang="az-Latn-AZ" altLang="en-US" sz="1300" b="0" i="0" u="none" strike="noStrike" cap="none" normalizeH="0" baseline="0">
+              <a:ln>
+                <a:noFill/>
+              </a:ln>
+              <a:solidFill>
+                <a:schemeClr val="tx1"/>
+              </a:solidFill>
+              <a:effectLst/>
+              <a:latin typeface="Arial" panose="020B0604020202020204" pitchFamily="34" charset="0"/>
+            </a:endParaRPr>
+          </a:p>
+          <a:p>
+            <a:pPr marL="285750" indent="-285750">
+              <a:lnSpc>
+                <a:spcPct val="150000"/>
+              </a:lnSpc>
+              <a:buFont typeface="Arial" panose="020B0604020202020204" pitchFamily="34" charset="0"/>
+              <a:buChar char="•"/>
+            </a:pPr>
+            <a:r>
+              <a:rPr kumimoji="0" lang="en-US" altLang="en-US" sz="1300" b="0" i="0" u="none" strike="noStrike" cap="none" normalizeH="0" baseline="0">
+                <a:ln>
+                  <a:noFill/>
+                </a:ln>
+                <a:solidFill>
+                  <a:schemeClr val="tx1"/>
+                </a:solidFill>
+                <a:effectLst/>
+                <a:latin typeface="Arial" panose="020B0604020202020204" pitchFamily="34" charset="0"/>
+              </a:rPr>
+              <a:t>posts-page-3</a:t>
+            </a:r>
+            <a:endParaRPr kumimoji="0" lang="az-Latn-AZ" altLang="en-US" sz="1300" b="0" i="0" u="none" strike="noStrike" cap="none" normalizeH="0" baseline="0">
+              <a:ln>
+                <a:noFill/>
+              </a:ln>
+              <a:solidFill>
+                <a:schemeClr val="tx1"/>
+              </a:solidFill>
+              <a:effectLst/>
+              <a:latin typeface="Arial" panose="020B0604020202020204" pitchFamily="34" charset="0"/>
+            </a:endParaRPr>
+          </a:p>
+          <a:p>
+            <a:pPr>
+              <a:lnSpc>
+                <a:spcPct val="150000"/>
+              </a:lnSpc>
+              <a:buNone/>
+            </a:pPr>
+            <a:r>
+              <a:rPr kumimoji="0" lang="en-US" altLang="en-US" sz="1300" b="0" i="0" u="none" strike="noStrike" cap="none" normalizeH="0" baseline="0">
+                <a:ln>
+                  <a:noFill/>
+                </a:ln>
+                <a:solidFill>
+                  <a:schemeClr val="tx1"/>
+                </a:solidFill>
+                <a:effectLst/>
+                <a:latin typeface="Arial" panose="020B0604020202020204" pitchFamily="34" charset="0"/>
+              </a:rPr>
+              <a:t>...</a:t>
+            </a:r>
+          </a:p>
+        </p:txBody>
+      </p:sp>
+      <p:pic>
+        <p:nvPicPr>
+          <p:cNvPr id="4" name="Picture 3">
+            <a:extLst>
+              <a:ext uri="{FF2B5EF4-FFF2-40B4-BE49-F238E27FC236}">
+                <a16:creationId xmlns:a16="http://schemas.microsoft.com/office/drawing/2014/main" id="{AF9C6CA1-AD54-660C-B749-A3B282C8B0D3}"/>
+              </a:ext>
+            </a:extLst>
+          </p:cNvPr>
+          <p:cNvPicPr>
+            <a:picLocks noChangeAspect="1"/>
+          </p:cNvPicPr>
+          <p:nvPr/>
+        </p:nvPicPr>
+        <p:blipFill>
+          <a:blip r:embed="rId2"/>
+          <a:stretch>
+            <a:fillRect/>
+          </a:stretch>
+        </p:blipFill>
+        <p:spPr>
+          <a:xfrm>
+            <a:off x="0" y="0"/>
+            <a:ext cx="6544588" cy="962159"/>
+          </a:xfrm>
+          <a:prstGeom prst="rect">
+            <a:avLst/>
+          </a:prstGeom>
+        </p:spPr>
+      </p:pic>
+      <p:pic>
+        <p:nvPicPr>
+          <p:cNvPr id="5" name="Picture 4">
+            <a:extLst>
+              <a:ext uri="{FF2B5EF4-FFF2-40B4-BE49-F238E27FC236}">
+                <a16:creationId xmlns:a16="http://schemas.microsoft.com/office/drawing/2014/main" id="{1D4D9A95-E4EE-AC8A-F212-E0E12D55EFE4}"/>
+              </a:ext>
+            </a:extLst>
+          </p:cNvPr>
+          <p:cNvPicPr>
+            <a:picLocks noChangeAspect="1"/>
+          </p:cNvPicPr>
+          <p:nvPr/>
+        </p:nvPicPr>
+        <p:blipFill>
+          <a:blip r:embed="rId3"/>
+          <a:stretch>
+            <a:fillRect/>
+          </a:stretch>
+        </p:blipFill>
+        <p:spPr>
+          <a:xfrm>
+            <a:off x="217714" y="2836310"/>
+            <a:ext cx="1743318" cy="562053"/>
+          </a:xfrm>
+          <a:prstGeom prst="rect">
+            <a:avLst/>
+          </a:prstGeom>
+        </p:spPr>
+      </p:pic>
     </p:spTree>
     <p:extLst>
       <p:ext uri="{BB962C8B-B14F-4D97-AF65-F5344CB8AC3E}">
@@ -3764,7 +4401,7 @@
         <p:spPr>
           <a:xfrm>
             <a:off x="217714" y="255046"/>
-            <a:ext cx="11756571" cy="355354"/>
+            <a:ext cx="11756571" cy="6408870"/>
           </a:xfrm>
           <a:prstGeom prst="rect">
             <a:avLst/>
@@ -3784,7 +4421,1284 @@
               <a:buNone/>
             </a:pPr>
             <a:r>
-              <a:rPr kumimoji="0" lang="en-US" altLang="en-US" sz="1300" b="0" i="0" u="none" strike="noStrike" cap="none" normalizeH="0" baseline="0">
+              <a:rPr kumimoji="0" lang="en-US" altLang="en-US" sz="1100" b="0" i="0" u="none" strike="noStrike" cap="none" normalizeH="0" baseline="0">
+                <a:ln>
+                  <a:noFill/>
+                </a:ln>
+                <a:solidFill>
+                  <a:schemeClr val="tx1"/>
+                </a:solidFill>
+                <a:effectLst/>
+                <a:latin typeface="Arial" panose="020B0604020202020204" pitchFamily="34" charset="0"/>
+              </a:rPr>
+              <a:t>2) </a:t>
+            </a:r>
+            <a:r>
+              <a:rPr kumimoji="0" lang="en-US" altLang="en-US" sz="1100" b="1" i="0" u="none" strike="noStrike" cap="none" normalizeH="0" baseline="0">
+                <a:ln>
+                  <a:noFill/>
+                </a:ln>
+                <a:solidFill>
+                  <a:srgbClr val="00B050"/>
+                </a:solidFill>
+                <a:effectLst/>
+                <a:latin typeface="Arial" panose="020B0604020202020204" pitchFamily="34" charset="0"/>
+              </a:rPr>
+              <a:t>posts-page- </a:t>
+            </a:r>
+            <a:r>
+              <a:rPr kumimoji="0" lang="en-US" altLang="en-US" sz="1100" b="0" i="0" u="none" strike="noStrike" cap="none" normalizeH="0" baseline="0">
+                <a:ln>
+                  <a:noFill/>
+                </a:ln>
+                <a:solidFill>
+                  <a:schemeClr val="tx1"/>
+                </a:solidFill>
+                <a:effectLst/>
+                <a:latin typeface="Arial" panose="020B0604020202020204" pitchFamily="34" charset="0"/>
+              </a:rPr>
+              <a:t>hissəsi nəyi ifadə edir?</a:t>
+            </a:r>
+            <a:endParaRPr kumimoji="0" lang="az-Latn-AZ" altLang="en-US" sz="1100" b="0" i="0" u="none" strike="noStrike" cap="none" normalizeH="0" baseline="0">
+              <a:ln>
+                <a:noFill/>
+              </a:ln>
+              <a:solidFill>
+                <a:schemeClr val="tx1"/>
+              </a:solidFill>
+              <a:effectLst/>
+              <a:latin typeface="Arial" panose="020B0604020202020204" pitchFamily="34" charset="0"/>
+            </a:endParaRPr>
+          </a:p>
+          <a:p>
+            <a:pPr>
+              <a:lnSpc>
+                <a:spcPct val="150000"/>
+              </a:lnSpc>
+              <a:buNone/>
+            </a:pPr>
+            <a:endParaRPr lang="az-Latn-AZ" altLang="en-US" sz="1100">
+              <a:latin typeface="Arial" panose="020B0604020202020204" pitchFamily="34" charset="0"/>
+            </a:endParaRPr>
+          </a:p>
+          <a:p>
+            <a:pPr>
+              <a:lnSpc>
+                <a:spcPct val="150000"/>
+              </a:lnSpc>
+              <a:buNone/>
+            </a:pPr>
+            <a:r>
+              <a:rPr kumimoji="0" lang="en-US" altLang="en-US" sz="1100" b="0" i="0" u="none" strike="noStrike" cap="none" normalizeH="0" baseline="0">
+                <a:ln>
+                  <a:noFill/>
+                </a:ln>
+                <a:solidFill>
+                  <a:schemeClr val="tx1"/>
+                </a:solidFill>
+                <a:effectLst/>
+                <a:latin typeface="Arial" panose="020B0604020202020204" pitchFamily="34" charset="0"/>
+              </a:rPr>
+              <a:t>Bu, açarın ümumi hissəsidir və oxunaqlılığı artırır. Məsələn, sabah başqa bir yerdə </a:t>
+            </a:r>
+            <a:r>
+              <a:rPr kumimoji="0" lang="en-US" altLang="en-US" sz="1100" b="1" i="0" u="none" strike="noStrike" cap="none" normalizeH="0" baseline="0">
+                <a:ln>
+                  <a:noFill/>
+                </a:ln>
+                <a:solidFill>
+                  <a:schemeClr val="tx1"/>
+                </a:solidFill>
+                <a:effectLst/>
+                <a:latin typeface="Arial" panose="020B0604020202020204" pitchFamily="34" charset="0"/>
+              </a:rPr>
+              <a:t>Cache::forget('posts-page-2') </a:t>
+            </a:r>
+            <a:r>
+              <a:rPr kumimoji="0" lang="en-US" altLang="en-US" sz="1100" b="0" i="0" u="none" strike="noStrike" cap="none" normalizeH="0" baseline="0">
+                <a:ln>
+                  <a:noFill/>
+                </a:ln>
+                <a:solidFill>
+                  <a:schemeClr val="tx1"/>
+                </a:solidFill>
+                <a:effectLst/>
+                <a:latin typeface="Arial" panose="020B0604020202020204" pitchFamily="34" charset="0"/>
+              </a:rPr>
+              <a:t>yazsanız, aydın olur ki bu </a:t>
+            </a:r>
+            <a:r>
+              <a:rPr kumimoji="0" lang="en-US" altLang="en-US" sz="1100" b="1" u="none" strike="noStrike" cap="none" normalizeH="0" baseline="0">
+                <a:ln>
+                  <a:noFill/>
+                </a:ln>
+                <a:solidFill>
+                  <a:schemeClr val="tx1"/>
+                </a:solidFill>
+                <a:effectLst/>
+                <a:latin typeface="Arial" panose="020B0604020202020204" pitchFamily="34" charset="0"/>
+              </a:rPr>
+              <a:t>post</a:t>
+            </a:r>
+            <a:r>
+              <a:rPr kumimoji="0" lang="en-US" altLang="en-US" sz="1100" b="0" i="0" u="none" strike="noStrike" cap="none" normalizeH="0" baseline="0">
+                <a:ln>
+                  <a:noFill/>
+                </a:ln>
+                <a:solidFill>
+                  <a:schemeClr val="tx1"/>
+                </a:solidFill>
+                <a:effectLst/>
+                <a:latin typeface="Arial" panose="020B0604020202020204" pitchFamily="34" charset="0"/>
+              </a:rPr>
+              <a:t>-ların </a:t>
+            </a:r>
+            <a:r>
+              <a:rPr kumimoji="0" lang="en-US" altLang="en-US" sz="1100" b="1" i="0" u="none" strike="noStrike" cap="none" normalizeH="0" baseline="0">
+                <a:ln>
+                  <a:noFill/>
+                </a:ln>
+                <a:solidFill>
+                  <a:schemeClr val="tx1"/>
+                </a:solidFill>
+                <a:effectLst/>
+                <a:latin typeface="Arial" panose="020B0604020202020204" pitchFamily="34" charset="0"/>
+              </a:rPr>
+              <a:t>2-ci</a:t>
+            </a:r>
+            <a:r>
+              <a:rPr kumimoji="0" lang="en-US" altLang="en-US" sz="1100" b="0" i="0" u="none" strike="noStrike" cap="none" normalizeH="0" baseline="0">
+                <a:ln>
+                  <a:noFill/>
+                </a:ln>
+                <a:solidFill>
+                  <a:schemeClr val="tx1"/>
+                </a:solidFill>
+                <a:effectLst/>
+                <a:latin typeface="Arial" panose="020B0604020202020204" pitchFamily="34" charset="0"/>
+              </a:rPr>
+              <a:t> səhifəsinin </a:t>
+            </a:r>
+            <a:r>
+              <a:rPr kumimoji="0" lang="en-US" altLang="en-US" sz="1100" b="1" i="0" u="none" strike="noStrike" cap="none" normalizeH="0" baseline="0">
+                <a:ln>
+                  <a:noFill/>
+                </a:ln>
+                <a:solidFill>
+                  <a:schemeClr val="tx1"/>
+                </a:solidFill>
+                <a:effectLst/>
+                <a:latin typeface="Arial" panose="020B0604020202020204" pitchFamily="34" charset="0"/>
+              </a:rPr>
+              <a:t>cache</a:t>
+            </a:r>
+            <a:r>
+              <a:rPr kumimoji="0" lang="en-US" altLang="en-US" sz="1100" b="0" i="0" u="none" strike="noStrike" cap="none" normalizeH="0" baseline="0">
+                <a:ln>
+                  <a:noFill/>
+                </a:ln>
+                <a:solidFill>
+                  <a:schemeClr val="tx1"/>
+                </a:solidFill>
+                <a:effectLst/>
+                <a:latin typeface="Arial" panose="020B0604020202020204" pitchFamily="34" charset="0"/>
+              </a:rPr>
+              <a:t>-idir. İstəsəniz buna başqa ad da verə bilərsiniz, məsələn:</a:t>
+            </a:r>
+            <a:endParaRPr kumimoji="0" lang="az-Latn-AZ" altLang="en-US" sz="1100" b="0" i="0" u="none" strike="noStrike" cap="none" normalizeH="0" baseline="0">
+              <a:ln>
+                <a:noFill/>
+              </a:ln>
+              <a:solidFill>
+                <a:schemeClr val="tx1"/>
+              </a:solidFill>
+              <a:effectLst/>
+              <a:latin typeface="Arial" panose="020B0604020202020204" pitchFamily="34" charset="0"/>
+            </a:endParaRPr>
+          </a:p>
+          <a:p>
+            <a:pPr>
+              <a:lnSpc>
+                <a:spcPct val="150000"/>
+              </a:lnSpc>
+              <a:buNone/>
+            </a:pPr>
+            <a:endParaRPr lang="az-Latn-AZ" altLang="en-US" sz="1100">
+              <a:latin typeface="Arial" panose="020B0604020202020204" pitchFamily="34" charset="0"/>
+            </a:endParaRPr>
+          </a:p>
+          <a:p>
+            <a:pPr>
+              <a:lnSpc>
+                <a:spcPct val="150000"/>
+              </a:lnSpc>
+              <a:buNone/>
+            </a:pPr>
+            <a:endParaRPr kumimoji="0" lang="az-Latn-AZ" altLang="en-US" sz="1100" b="0" i="0" u="none" strike="noStrike" cap="none" normalizeH="0" baseline="0">
+              <a:ln>
+                <a:noFill/>
+              </a:ln>
+              <a:solidFill>
+                <a:schemeClr val="tx1"/>
+              </a:solidFill>
+              <a:effectLst/>
+              <a:latin typeface="Arial" panose="020B0604020202020204" pitchFamily="34" charset="0"/>
+            </a:endParaRPr>
+          </a:p>
+          <a:p>
+            <a:pPr>
+              <a:lnSpc>
+                <a:spcPct val="150000"/>
+              </a:lnSpc>
+              <a:buNone/>
+            </a:pPr>
+            <a:endParaRPr lang="az-Latn-AZ" altLang="en-US" sz="1100">
+              <a:latin typeface="Arial" panose="020B0604020202020204" pitchFamily="34" charset="0"/>
+            </a:endParaRPr>
+          </a:p>
+          <a:p>
+            <a:pPr>
+              <a:lnSpc>
+                <a:spcPct val="150000"/>
+              </a:lnSpc>
+              <a:buNone/>
+            </a:pPr>
+            <a:endParaRPr kumimoji="0" lang="az-Latn-AZ" altLang="en-US" sz="1100" b="0" i="0" u="none" strike="noStrike" cap="none" normalizeH="0" baseline="0">
+              <a:ln>
+                <a:noFill/>
+              </a:ln>
+              <a:solidFill>
+                <a:schemeClr val="tx1"/>
+              </a:solidFill>
+              <a:effectLst/>
+              <a:latin typeface="Arial" panose="020B0604020202020204" pitchFamily="34" charset="0"/>
+            </a:endParaRPr>
+          </a:p>
+          <a:p>
+            <a:pPr>
+              <a:lnSpc>
+                <a:spcPct val="150000"/>
+              </a:lnSpc>
+              <a:buNone/>
+            </a:pPr>
+            <a:r>
+              <a:rPr kumimoji="0" lang="en-US" altLang="en-US" sz="1100" b="0" i="0" u="none" strike="noStrike" cap="none" normalizeH="0" baseline="0">
+                <a:ln>
+                  <a:noFill/>
+                </a:ln>
+                <a:solidFill>
+                  <a:schemeClr val="tx1"/>
+                </a:solidFill>
+                <a:effectLst/>
+                <a:latin typeface="Arial" panose="020B0604020202020204" pitchFamily="34" charset="0"/>
+              </a:rPr>
+              <a:t>3) </a:t>
+            </a:r>
+            <a:r>
+              <a:rPr kumimoji="0" lang="en-US" altLang="en-US" sz="1100" b="1" i="0" u="none" strike="noStrike" cap="none" normalizeH="0" baseline="0">
+                <a:ln>
+                  <a:noFill/>
+                </a:ln>
+                <a:solidFill>
+                  <a:srgbClr val="00B050"/>
+                </a:solidFill>
+                <a:effectLst/>
+                <a:latin typeface="Arial" panose="020B0604020202020204" pitchFamily="34" charset="0"/>
+              </a:rPr>
+              <a:t>request() </a:t>
+            </a:r>
+            <a:r>
+              <a:rPr kumimoji="0" lang="en-US" altLang="en-US" sz="1100" b="0" i="0" u="none" strike="noStrike" cap="none" normalizeH="0" baseline="0">
+                <a:ln>
+                  <a:noFill/>
+                </a:ln>
+                <a:solidFill>
+                  <a:schemeClr val="tx1"/>
+                </a:solidFill>
+                <a:effectLst/>
+                <a:latin typeface="Arial" panose="020B0604020202020204" pitchFamily="34" charset="0"/>
+              </a:rPr>
+              <a:t>nə edir və </a:t>
+            </a:r>
+            <a:r>
+              <a:rPr kumimoji="0" lang="en-US" altLang="en-US" sz="1100" b="1" i="0" u="none" strike="noStrike" cap="none" normalizeH="0" baseline="0">
+                <a:ln>
+                  <a:noFill/>
+                </a:ln>
+                <a:solidFill>
+                  <a:srgbClr val="00B050"/>
+                </a:solidFill>
+                <a:effectLst/>
+                <a:latin typeface="Arial" panose="020B0604020202020204" pitchFamily="34" charset="0"/>
+              </a:rPr>
+              <a:t>request('page', 1) </a:t>
+            </a:r>
+            <a:r>
+              <a:rPr kumimoji="0" lang="en-US" altLang="en-US" sz="1100" b="0" i="0" u="none" strike="noStrike" cap="none" normalizeH="0" baseline="0">
+                <a:ln>
+                  <a:noFill/>
+                </a:ln>
+                <a:solidFill>
+                  <a:schemeClr val="tx1"/>
+                </a:solidFill>
+                <a:effectLst/>
+                <a:latin typeface="Arial" panose="020B0604020202020204" pitchFamily="34" charset="0"/>
+              </a:rPr>
+              <a:t>nə deməkdir?</a:t>
+            </a:r>
+            <a:endParaRPr kumimoji="0" lang="az-Latn-AZ" altLang="en-US" sz="1100" b="0" i="0" u="none" strike="noStrike" cap="none" normalizeH="0" baseline="0">
+              <a:ln>
+                <a:noFill/>
+              </a:ln>
+              <a:solidFill>
+                <a:schemeClr val="tx1"/>
+              </a:solidFill>
+              <a:effectLst/>
+              <a:latin typeface="Arial" panose="020B0604020202020204" pitchFamily="34" charset="0"/>
+            </a:endParaRPr>
+          </a:p>
+          <a:p>
+            <a:pPr>
+              <a:lnSpc>
+                <a:spcPct val="150000"/>
+              </a:lnSpc>
+              <a:buNone/>
+            </a:pPr>
+            <a:endParaRPr lang="az-Latn-AZ" altLang="en-US" sz="1100">
+              <a:latin typeface="Arial" panose="020B0604020202020204" pitchFamily="34" charset="0"/>
+            </a:endParaRPr>
+          </a:p>
+          <a:p>
+            <a:pPr>
+              <a:lnSpc>
+                <a:spcPct val="150000"/>
+              </a:lnSpc>
+              <a:buNone/>
+            </a:pPr>
+            <a:r>
+              <a:rPr kumimoji="0" lang="en-US" altLang="en-US" sz="1100" b="0" i="0" u="none" strike="noStrike" cap="none" normalizeH="0" baseline="0">
+                <a:ln>
+                  <a:noFill/>
+                </a:ln>
+                <a:solidFill>
+                  <a:schemeClr val="tx1"/>
+                </a:solidFill>
+                <a:effectLst/>
+                <a:latin typeface="Arial" panose="020B0604020202020204" pitchFamily="34" charset="0"/>
+              </a:rPr>
+              <a:t>Laravel-də </a:t>
+            </a:r>
+            <a:r>
+              <a:rPr kumimoji="0" lang="en-US" altLang="en-US" sz="1100" b="1" i="0" u="none" strike="noStrike" cap="none" normalizeH="0" baseline="0">
+                <a:ln>
+                  <a:noFill/>
+                </a:ln>
+                <a:solidFill>
+                  <a:srgbClr val="FF0000"/>
+                </a:solidFill>
+                <a:effectLst/>
+                <a:latin typeface="Arial" panose="020B0604020202020204" pitchFamily="34" charset="0"/>
+              </a:rPr>
+              <a:t>request()</a:t>
+            </a:r>
+            <a:r>
+              <a:rPr kumimoji="0" lang="en-US" altLang="en-US" sz="1100" b="0" i="0" u="none" strike="noStrike" cap="none" normalizeH="0" baseline="0">
+                <a:ln>
+                  <a:noFill/>
+                </a:ln>
+                <a:solidFill>
+                  <a:schemeClr val="tx1"/>
+                </a:solidFill>
+                <a:effectLst/>
+                <a:latin typeface="Arial" panose="020B0604020202020204" pitchFamily="34" charset="0"/>
+              </a:rPr>
+              <a:t> helper metodu bizə </a:t>
+            </a:r>
+            <a:r>
+              <a:rPr kumimoji="0" lang="en-US" altLang="en-US" sz="1100" b="1" i="0" u="none" strike="noStrike" cap="none" normalizeH="0" baseline="0">
+                <a:ln>
+                  <a:noFill/>
+                </a:ln>
+                <a:solidFill>
+                  <a:schemeClr val="tx1"/>
+                </a:solidFill>
+                <a:effectLst/>
+                <a:latin typeface="Arial" panose="020B0604020202020204" pitchFamily="34" charset="0"/>
+              </a:rPr>
+              <a:t>HTTP</a:t>
+            </a:r>
+            <a:r>
+              <a:rPr kumimoji="0" lang="en-US" altLang="en-US" sz="1100" b="0" i="0" u="none" strike="noStrike" cap="none" normalizeH="0" baseline="0">
+                <a:ln>
+                  <a:noFill/>
+                </a:ln>
+                <a:solidFill>
+                  <a:schemeClr val="tx1"/>
+                </a:solidFill>
+                <a:effectLst/>
+                <a:latin typeface="Arial" panose="020B0604020202020204" pitchFamily="34" charset="0"/>
+              </a:rPr>
+              <a:t> sorğusunu idarə etməyə imkan verir. Bu </a:t>
+            </a:r>
+            <a:r>
+              <a:rPr kumimoji="0" lang="en-US" altLang="en-US" sz="1100" b="1" i="0" u="none" strike="noStrike" cap="none" normalizeH="0" baseline="0">
+                <a:ln>
+                  <a:noFill/>
+                </a:ln>
+                <a:solidFill>
+                  <a:schemeClr val="tx1"/>
+                </a:solidFill>
+                <a:effectLst/>
+                <a:latin typeface="Arial" panose="020B0604020202020204" pitchFamily="34" charset="0"/>
+              </a:rPr>
+              <a:t>Request</a:t>
+            </a:r>
+            <a:r>
+              <a:rPr kumimoji="0" lang="en-US" altLang="en-US" sz="1100" b="0" i="0" u="none" strike="noStrike" cap="none" normalizeH="0" baseline="0">
+                <a:ln>
+                  <a:noFill/>
+                </a:ln>
+                <a:solidFill>
+                  <a:schemeClr val="tx1"/>
+                </a:solidFill>
+                <a:effectLst/>
+                <a:latin typeface="Arial" panose="020B0604020202020204" pitchFamily="34" charset="0"/>
+              </a:rPr>
+              <a:t> obyektidir.</a:t>
+            </a:r>
+            <a:endParaRPr kumimoji="0" lang="az-Latn-AZ" altLang="en-US" sz="1100" b="0" i="0" u="none" strike="noStrike" cap="none" normalizeH="0" baseline="0">
+              <a:ln>
+                <a:noFill/>
+              </a:ln>
+              <a:solidFill>
+                <a:schemeClr val="tx1"/>
+              </a:solidFill>
+              <a:effectLst/>
+              <a:latin typeface="Arial" panose="020B0604020202020204" pitchFamily="34" charset="0"/>
+            </a:endParaRPr>
+          </a:p>
+          <a:p>
+            <a:pPr>
+              <a:lnSpc>
+                <a:spcPct val="150000"/>
+              </a:lnSpc>
+              <a:buNone/>
+            </a:pPr>
+            <a:endParaRPr lang="az-Latn-AZ" altLang="en-US" sz="1100">
+              <a:latin typeface="Arial" panose="020B0604020202020204" pitchFamily="34" charset="0"/>
+            </a:endParaRPr>
+          </a:p>
+          <a:p>
+            <a:pPr>
+              <a:lnSpc>
+                <a:spcPct val="150000"/>
+              </a:lnSpc>
+              <a:buNone/>
+            </a:pPr>
+            <a:endParaRPr kumimoji="0" lang="az-Latn-AZ" altLang="en-US" sz="1100" b="0" i="0" u="none" strike="noStrike" cap="none" normalizeH="0" baseline="0">
+              <a:ln>
+                <a:noFill/>
+              </a:ln>
+              <a:solidFill>
+                <a:schemeClr val="tx1"/>
+              </a:solidFill>
+              <a:effectLst/>
+              <a:latin typeface="Arial" panose="020B0604020202020204" pitchFamily="34" charset="0"/>
+            </a:endParaRPr>
+          </a:p>
+          <a:p>
+            <a:pPr>
+              <a:lnSpc>
+                <a:spcPct val="150000"/>
+              </a:lnSpc>
+              <a:buNone/>
+            </a:pPr>
+            <a:endParaRPr lang="az-Latn-AZ" altLang="en-US" sz="1100">
+              <a:latin typeface="Arial" panose="020B0604020202020204" pitchFamily="34" charset="0"/>
+            </a:endParaRPr>
+          </a:p>
+          <a:p>
+            <a:pPr>
+              <a:lnSpc>
+                <a:spcPct val="150000"/>
+              </a:lnSpc>
+              <a:buNone/>
+            </a:pPr>
+            <a:r>
+              <a:rPr kumimoji="0" lang="en-US" altLang="en-US" sz="1100" b="1" i="0" u="none" strike="noStrike" cap="none" normalizeH="0" baseline="0">
+                <a:ln>
+                  <a:noFill/>
+                </a:ln>
+                <a:solidFill>
+                  <a:schemeClr val="tx1"/>
+                </a:solidFill>
+                <a:effectLst/>
+                <a:latin typeface="Arial" panose="020B0604020202020204" pitchFamily="34" charset="0"/>
+              </a:rPr>
+              <a:t>Bu funksiya</a:t>
+            </a:r>
+            <a:r>
+              <a:rPr kumimoji="0" lang="az-Latn-AZ" altLang="en-US" sz="1100" b="1" i="0" u="none" strike="noStrike" cap="none" normalizeH="0" baseline="0">
+                <a:ln>
+                  <a:noFill/>
+                </a:ln>
+                <a:solidFill>
+                  <a:schemeClr val="tx1"/>
+                </a:solidFill>
+                <a:effectLst/>
+                <a:latin typeface="Arial" panose="020B0604020202020204" pitchFamily="34" charset="0"/>
+              </a:rPr>
+              <a:t> o</a:t>
+            </a:r>
+            <a:r>
+              <a:rPr kumimoji="0" lang="en-US" altLang="en-US" sz="1100" b="1" i="0" u="none" strike="noStrike" cap="none" normalizeH="0" baseline="0">
+                <a:ln>
+                  <a:noFill/>
+                </a:ln>
+                <a:solidFill>
+                  <a:schemeClr val="tx1"/>
+                </a:solidFill>
+                <a:effectLst/>
+                <a:latin typeface="Arial" panose="020B0604020202020204" pitchFamily="34" charset="0"/>
+              </a:rPr>
+              <a:t> deməkdir</a:t>
+            </a:r>
+            <a:r>
+              <a:rPr kumimoji="0" lang="az-Latn-AZ" altLang="en-US" sz="1100" b="1" i="0" u="none" strike="noStrike" cap="none" normalizeH="0" baseline="0">
+                <a:ln>
+                  <a:noFill/>
+                </a:ln>
+                <a:solidFill>
+                  <a:schemeClr val="tx1"/>
+                </a:solidFill>
+                <a:effectLst/>
+                <a:latin typeface="Arial" panose="020B0604020202020204" pitchFamily="34" charset="0"/>
+              </a:rPr>
+              <a:t> ki</a:t>
+            </a:r>
+            <a:r>
+              <a:rPr kumimoji="0" lang="en-US" altLang="en-US" sz="1100" b="0" i="0" u="none" strike="noStrike" cap="none" normalizeH="0" baseline="0">
+                <a:ln>
+                  <a:noFill/>
+                </a:ln>
+                <a:solidFill>
+                  <a:schemeClr val="tx1"/>
+                </a:solidFill>
+                <a:effectLst/>
+                <a:latin typeface="Arial" panose="020B0604020202020204" pitchFamily="34" charset="0"/>
+              </a:rPr>
+              <a:t>: </a:t>
+            </a:r>
+            <a:endParaRPr kumimoji="0" lang="az-Latn-AZ" altLang="en-US" sz="1100" b="0" i="0" u="none" strike="noStrike" cap="none" normalizeH="0" baseline="0">
+              <a:ln>
+                <a:noFill/>
+              </a:ln>
+              <a:solidFill>
+                <a:schemeClr val="tx1"/>
+              </a:solidFill>
+              <a:effectLst/>
+              <a:latin typeface="Arial" panose="020B0604020202020204" pitchFamily="34" charset="0"/>
+            </a:endParaRPr>
+          </a:p>
+          <a:p>
+            <a:pPr marL="742950" lvl="1" indent="-285750">
+              <a:lnSpc>
+                <a:spcPct val="150000"/>
+              </a:lnSpc>
+              <a:buFont typeface="Arial" panose="020B0604020202020204" pitchFamily="34" charset="0"/>
+              <a:buChar char="•"/>
+            </a:pPr>
+            <a:r>
+              <a:rPr kumimoji="0" lang="en-US" altLang="en-US" sz="1100" b="0" i="0" u="none" strike="noStrike" cap="none" normalizeH="0" baseline="0">
+                <a:ln>
+                  <a:noFill/>
+                </a:ln>
+                <a:solidFill>
+                  <a:schemeClr val="tx1"/>
+                </a:solidFill>
+                <a:effectLst/>
+                <a:latin typeface="Arial" panose="020B0604020202020204" pitchFamily="34" charset="0"/>
+              </a:rPr>
+              <a:t>Əgər </a:t>
+            </a:r>
+            <a:r>
+              <a:rPr kumimoji="0" lang="en-US" altLang="en-US" sz="1100" b="1" i="0" u="none" strike="noStrike" cap="none" normalizeH="0" baseline="0">
+                <a:ln>
+                  <a:noFill/>
+                </a:ln>
+                <a:solidFill>
+                  <a:schemeClr val="tx1"/>
+                </a:solidFill>
+                <a:effectLst/>
+                <a:latin typeface="Arial" panose="020B0604020202020204" pitchFamily="34" charset="0"/>
+              </a:rPr>
+              <a:t>URL</a:t>
+            </a:r>
+            <a:r>
+              <a:rPr kumimoji="0" lang="en-US" altLang="en-US" sz="1100" b="0" i="0" u="none" strike="noStrike" cap="none" normalizeH="0" baseline="0">
+                <a:ln>
+                  <a:noFill/>
+                </a:ln>
+                <a:solidFill>
+                  <a:schemeClr val="tx1"/>
+                </a:solidFill>
+                <a:effectLst/>
+                <a:latin typeface="Arial" panose="020B0604020202020204" pitchFamily="34" charset="0"/>
+              </a:rPr>
+              <a:t>-də </a:t>
+            </a:r>
+            <a:r>
+              <a:rPr kumimoji="0" lang="en-US" altLang="en-US" sz="1100" b="1" i="0" u="none" strike="noStrike" cap="none" normalizeH="0" baseline="0">
+                <a:ln>
+                  <a:noFill/>
+                </a:ln>
+                <a:solidFill>
+                  <a:srgbClr val="0070C0"/>
+                </a:solidFill>
+                <a:effectLst/>
+                <a:latin typeface="Arial" panose="020B0604020202020204" pitchFamily="34" charset="0"/>
+              </a:rPr>
+              <a:t>page</a:t>
+            </a:r>
+            <a:r>
+              <a:rPr kumimoji="0" lang="en-US" altLang="en-US" sz="1100" b="0" i="0" u="none" strike="noStrike" cap="none" normalizeH="0" baseline="0">
+                <a:ln>
+                  <a:noFill/>
+                </a:ln>
+                <a:solidFill>
+                  <a:schemeClr val="tx1"/>
+                </a:solidFill>
+                <a:effectLst/>
+                <a:latin typeface="Arial" panose="020B0604020202020204" pitchFamily="34" charset="0"/>
+              </a:rPr>
+              <a:t> parametri varsa, onun </a:t>
+            </a:r>
+            <a:r>
+              <a:rPr kumimoji="0" lang="en-US" altLang="en-US" sz="1100" b="1" i="0" u="none" strike="noStrike" cap="none" normalizeH="0" baseline="0">
+                <a:ln>
+                  <a:noFill/>
+                </a:ln>
+                <a:solidFill>
+                  <a:schemeClr val="tx1"/>
+                </a:solidFill>
+                <a:effectLst/>
+                <a:latin typeface="Arial" panose="020B0604020202020204" pitchFamily="34" charset="0"/>
+              </a:rPr>
+              <a:t>dəyərini</a:t>
+            </a:r>
+            <a:r>
+              <a:rPr kumimoji="0" lang="en-US" altLang="en-US" sz="1100" b="0" i="0" u="none" strike="noStrike" cap="none" normalizeH="0" baseline="0">
+                <a:ln>
+                  <a:noFill/>
+                </a:ln>
+                <a:solidFill>
+                  <a:schemeClr val="tx1"/>
+                </a:solidFill>
+                <a:effectLst/>
+                <a:latin typeface="Arial" panose="020B0604020202020204" pitchFamily="34" charset="0"/>
+              </a:rPr>
+              <a:t> götür. </a:t>
+            </a:r>
+            <a:endParaRPr kumimoji="0" lang="az-Latn-AZ" altLang="en-US" sz="1100" b="0" i="0" u="none" strike="noStrike" cap="none" normalizeH="0" baseline="0">
+              <a:ln>
+                <a:noFill/>
+              </a:ln>
+              <a:solidFill>
+                <a:schemeClr val="tx1"/>
+              </a:solidFill>
+              <a:effectLst/>
+              <a:latin typeface="Arial" panose="020B0604020202020204" pitchFamily="34" charset="0"/>
+            </a:endParaRPr>
+          </a:p>
+          <a:p>
+            <a:pPr marL="742950" lvl="1" indent="-285750">
+              <a:lnSpc>
+                <a:spcPct val="150000"/>
+              </a:lnSpc>
+              <a:buFont typeface="Arial" panose="020B0604020202020204" pitchFamily="34" charset="0"/>
+              <a:buChar char="•"/>
+            </a:pPr>
+            <a:r>
+              <a:rPr kumimoji="0" lang="en-US" altLang="en-US" sz="1100" b="0" i="0" u="none" strike="noStrike" cap="none" normalizeH="0" baseline="0">
+                <a:ln>
+                  <a:noFill/>
+                </a:ln>
+                <a:solidFill>
+                  <a:schemeClr val="tx1"/>
+                </a:solidFill>
+                <a:effectLst/>
+                <a:latin typeface="Arial" panose="020B0604020202020204" pitchFamily="34" charset="0"/>
+              </a:rPr>
+              <a:t>Yoxdursa, </a:t>
+            </a:r>
+            <a:r>
+              <a:rPr kumimoji="0" lang="az-Latn-AZ" altLang="en-US" sz="1100" b="1" i="0" u="none" strike="noStrike" cap="none" normalizeH="0" baseline="0">
+                <a:ln>
+                  <a:noFill/>
+                </a:ln>
+                <a:solidFill>
+                  <a:schemeClr val="tx1"/>
+                </a:solidFill>
+                <a:effectLst/>
+                <a:latin typeface="Arial" panose="020B0604020202020204" pitchFamily="34" charset="0"/>
+              </a:rPr>
+              <a:t>default</a:t>
+            </a:r>
+            <a:r>
+              <a:rPr kumimoji="0" lang="az-Latn-AZ" altLang="en-US" sz="1100" b="0" i="0" u="none" strike="noStrike" cap="none" normalizeH="0" baseline="0">
+                <a:ln>
+                  <a:noFill/>
+                </a:ln>
+                <a:solidFill>
+                  <a:schemeClr val="tx1"/>
+                </a:solidFill>
+                <a:effectLst/>
+                <a:latin typeface="Arial" panose="020B0604020202020204" pitchFamily="34" charset="0"/>
+              </a:rPr>
+              <a:t> olaraq </a:t>
+            </a:r>
+            <a:r>
+              <a:rPr kumimoji="0" lang="en-US" altLang="en-US" sz="1100" b="1" i="0" u="none" strike="noStrike" cap="none" normalizeH="0" baseline="0">
+                <a:ln>
+                  <a:noFill/>
+                </a:ln>
+                <a:solidFill>
+                  <a:srgbClr val="0070C0"/>
+                </a:solidFill>
+                <a:effectLst/>
+                <a:latin typeface="Arial" panose="020B0604020202020204" pitchFamily="34" charset="0"/>
+              </a:rPr>
+              <a:t>1 </a:t>
+            </a:r>
+            <a:r>
+              <a:rPr kumimoji="0" lang="en-US" altLang="en-US" sz="1100" b="0" i="0" u="none" strike="noStrike" cap="none" normalizeH="0" baseline="0">
+                <a:ln>
+                  <a:noFill/>
+                </a:ln>
+                <a:solidFill>
+                  <a:schemeClr val="tx1"/>
+                </a:solidFill>
+                <a:effectLst/>
+                <a:latin typeface="Arial" panose="020B0604020202020204" pitchFamily="34" charset="0"/>
+              </a:rPr>
+              <a:t>götür.</a:t>
+            </a:r>
+            <a:endParaRPr kumimoji="0" lang="az-Latn-AZ" altLang="en-US" sz="1100" b="0" i="0" u="none" strike="noStrike" cap="none" normalizeH="0" baseline="0">
+              <a:ln>
+                <a:noFill/>
+              </a:ln>
+              <a:solidFill>
+                <a:schemeClr val="tx1"/>
+              </a:solidFill>
+              <a:effectLst/>
+              <a:latin typeface="Arial" panose="020B0604020202020204" pitchFamily="34" charset="0"/>
+            </a:endParaRPr>
+          </a:p>
+          <a:p>
+            <a:pPr>
+              <a:lnSpc>
+                <a:spcPct val="150000"/>
+              </a:lnSpc>
+              <a:buNone/>
+            </a:pPr>
+            <a:endParaRPr kumimoji="0" lang="az-Latn-AZ" altLang="en-US" sz="1100" b="0" i="0" u="none" strike="noStrike" cap="none" normalizeH="0" baseline="0">
+              <a:ln>
+                <a:noFill/>
+              </a:ln>
+              <a:solidFill>
+                <a:schemeClr val="tx1"/>
+              </a:solidFill>
+              <a:effectLst/>
+              <a:latin typeface="Arial" panose="020B0604020202020204" pitchFamily="34" charset="0"/>
+            </a:endParaRPr>
+          </a:p>
+          <a:p>
+            <a:pPr>
+              <a:lnSpc>
+                <a:spcPct val="150000"/>
+              </a:lnSpc>
+              <a:buNone/>
+            </a:pPr>
+            <a:r>
+              <a:rPr kumimoji="0" lang="en-US" altLang="en-US" sz="1100" b="1" i="0" u="none" strike="noStrike" cap="none" normalizeH="0" baseline="0">
+                <a:ln>
+                  <a:noFill/>
+                </a:ln>
+                <a:solidFill>
+                  <a:schemeClr val="tx1"/>
+                </a:solidFill>
+                <a:effectLst/>
+                <a:latin typeface="Arial" panose="020B0604020202020204" pitchFamily="34" charset="0"/>
+              </a:rPr>
+              <a:t>Məsələn</a:t>
+            </a:r>
+            <a:r>
+              <a:rPr kumimoji="0" lang="en-US" altLang="en-US" sz="1100" b="0" i="0" u="none" strike="noStrike" cap="none" normalizeH="0" baseline="0">
+                <a:ln>
+                  <a:noFill/>
+                </a:ln>
+                <a:solidFill>
+                  <a:schemeClr val="tx1"/>
+                </a:solidFill>
+                <a:effectLst/>
+                <a:latin typeface="Arial" panose="020B0604020202020204" pitchFamily="34" charset="0"/>
+              </a:rPr>
+              <a:t>: </a:t>
+            </a:r>
+            <a:endParaRPr kumimoji="0" lang="az-Latn-AZ" altLang="en-US" sz="1100" b="0" i="0" u="none" strike="noStrike" cap="none" normalizeH="0" baseline="0">
+              <a:ln>
+                <a:noFill/>
+              </a:ln>
+              <a:solidFill>
+                <a:schemeClr val="tx1"/>
+              </a:solidFill>
+              <a:effectLst/>
+              <a:latin typeface="Arial" panose="020B0604020202020204" pitchFamily="34" charset="0"/>
+            </a:endParaRPr>
+          </a:p>
+          <a:p>
+            <a:pPr marL="742950" lvl="1" indent="-285750">
+              <a:lnSpc>
+                <a:spcPct val="150000"/>
+              </a:lnSpc>
+              <a:buFont typeface="Arial" panose="020B0604020202020204" pitchFamily="34" charset="0"/>
+              <a:buChar char="•"/>
+            </a:pPr>
+            <a:r>
+              <a:rPr kumimoji="0" lang="en-US" altLang="en-US" sz="1100" b="1" i="0" u="none" strike="noStrike" cap="none" normalizeH="0" baseline="0">
+                <a:ln>
+                  <a:noFill/>
+                </a:ln>
+                <a:solidFill>
+                  <a:schemeClr val="tx1"/>
+                </a:solidFill>
+                <a:effectLst/>
+                <a:latin typeface="Arial" panose="020B0604020202020204" pitchFamily="34" charset="0"/>
+              </a:rPr>
+              <a:t>/index?page=3 </a:t>
+            </a:r>
+            <a:r>
+              <a:rPr kumimoji="0" lang="en-US" altLang="en-US" sz="1100" b="0" i="0" u="none" strike="noStrike" cap="none" normalizeH="0" baseline="0">
+                <a:ln>
+                  <a:noFill/>
+                </a:ln>
+                <a:solidFill>
+                  <a:schemeClr val="tx1"/>
+                </a:solidFill>
+                <a:effectLst/>
+                <a:latin typeface="Arial" panose="020B0604020202020204" pitchFamily="34" charset="0"/>
+              </a:rPr>
+              <a:t>→ </a:t>
+            </a:r>
+            <a:r>
+              <a:rPr kumimoji="0" lang="en-US" altLang="en-US" sz="1100" b="1" i="0" u="none" strike="noStrike" cap="none" normalizeH="0" baseline="0">
+                <a:ln>
+                  <a:noFill/>
+                </a:ln>
+                <a:solidFill>
+                  <a:schemeClr val="tx1"/>
+                </a:solidFill>
+                <a:effectLst/>
+                <a:latin typeface="Arial" panose="020B0604020202020204" pitchFamily="34" charset="0"/>
+              </a:rPr>
+              <a:t>request('page', 1) </a:t>
+            </a:r>
+            <a:r>
+              <a:rPr kumimoji="0" lang="en-US" altLang="en-US" sz="1100" b="0" i="0" u="none" strike="noStrike" cap="none" normalizeH="0" baseline="0">
+                <a:ln>
+                  <a:noFill/>
+                </a:ln>
+                <a:solidFill>
+                  <a:schemeClr val="tx1"/>
+                </a:solidFill>
+                <a:effectLst/>
+                <a:latin typeface="Arial" panose="020B0604020202020204" pitchFamily="34" charset="0"/>
+              </a:rPr>
+              <a:t>→ verir </a:t>
+            </a:r>
+            <a:r>
+              <a:rPr kumimoji="0" lang="en-US" altLang="en-US" sz="1100" b="1" i="0" u="none" strike="noStrike" cap="none" normalizeH="0" baseline="0">
+                <a:ln>
+                  <a:noFill/>
+                </a:ln>
+                <a:solidFill>
+                  <a:schemeClr val="tx1"/>
+                </a:solidFill>
+                <a:effectLst/>
+                <a:latin typeface="Arial" panose="020B0604020202020204" pitchFamily="34" charset="0"/>
+              </a:rPr>
+              <a:t>3</a:t>
+            </a:r>
+            <a:r>
+              <a:rPr kumimoji="0" lang="en-US" altLang="en-US" sz="1100" b="0" i="0" u="none" strike="noStrike" cap="none" normalizeH="0" baseline="0">
+                <a:ln>
+                  <a:noFill/>
+                </a:ln>
+                <a:solidFill>
+                  <a:schemeClr val="tx1"/>
+                </a:solidFill>
+                <a:effectLst/>
+                <a:latin typeface="Arial" panose="020B0604020202020204" pitchFamily="34" charset="0"/>
+              </a:rPr>
+              <a:t> </a:t>
+            </a:r>
+            <a:endParaRPr kumimoji="0" lang="az-Latn-AZ" altLang="en-US" sz="1100" b="0" i="0" u="none" strike="noStrike" cap="none" normalizeH="0" baseline="0">
+              <a:ln>
+                <a:noFill/>
+              </a:ln>
+              <a:solidFill>
+                <a:schemeClr val="tx1"/>
+              </a:solidFill>
+              <a:effectLst/>
+              <a:latin typeface="Arial" panose="020B0604020202020204" pitchFamily="34" charset="0"/>
+            </a:endParaRPr>
+          </a:p>
+          <a:p>
+            <a:pPr marL="742950" lvl="1" indent="-285750">
+              <a:lnSpc>
+                <a:spcPct val="150000"/>
+              </a:lnSpc>
+              <a:buFont typeface="Arial" panose="020B0604020202020204" pitchFamily="34" charset="0"/>
+              <a:buChar char="•"/>
+            </a:pPr>
+            <a:r>
+              <a:rPr kumimoji="0" lang="en-US" altLang="en-US" sz="1100" b="1" i="0" u="none" strike="noStrike" cap="none" normalizeH="0" baseline="0">
+                <a:ln>
+                  <a:noFill/>
+                </a:ln>
+                <a:solidFill>
+                  <a:schemeClr val="tx1"/>
+                </a:solidFill>
+                <a:effectLst/>
+                <a:latin typeface="Arial" panose="020B0604020202020204" pitchFamily="34" charset="0"/>
+              </a:rPr>
+              <a:t>/index </a:t>
+            </a:r>
+            <a:r>
+              <a:rPr kumimoji="0" lang="en-US" altLang="en-US" sz="1100" b="0" i="0" u="none" strike="noStrike" cap="none" normalizeH="0" baseline="0">
+                <a:ln>
+                  <a:noFill/>
+                </a:ln>
+                <a:solidFill>
+                  <a:schemeClr val="tx1"/>
+                </a:solidFill>
+                <a:effectLst/>
+                <a:latin typeface="Arial" panose="020B0604020202020204" pitchFamily="34" charset="0"/>
+              </a:rPr>
+              <a:t>(page parametri yoxdur) → verir </a:t>
+            </a:r>
+            <a:r>
+              <a:rPr kumimoji="0" lang="en-US" altLang="en-US" sz="1100" b="1" i="0" u="none" strike="noStrike" cap="none" normalizeH="0" baseline="0">
+                <a:ln>
+                  <a:noFill/>
+                </a:ln>
+                <a:solidFill>
+                  <a:schemeClr val="tx1"/>
+                </a:solidFill>
+                <a:effectLst/>
+                <a:latin typeface="Arial" panose="020B0604020202020204" pitchFamily="34" charset="0"/>
+              </a:rPr>
+              <a:t>1</a:t>
+            </a:r>
+            <a:endParaRPr kumimoji="0" lang="az-Latn-AZ" altLang="en-US" sz="1100" b="1" i="0" u="none" strike="noStrike" cap="none" normalizeH="0" baseline="0">
+              <a:ln>
+                <a:noFill/>
+              </a:ln>
+              <a:solidFill>
+                <a:schemeClr val="tx1"/>
+              </a:solidFill>
+              <a:effectLst/>
+              <a:latin typeface="Arial" panose="020B0604020202020204" pitchFamily="34" charset="0"/>
+            </a:endParaRPr>
+          </a:p>
+          <a:p>
+            <a:pPr marL="0" lvl="1">
+              <a:lnSpc>
+                <a:spcPct val="150000"/>
+              </a:lnSpc>
+            </a:pPr>
+            <a:endParaRPr lang="az-Latn-AZ" altLang="en-US" sz="1100" b="1">
+              <a:latin typeface="Arial" panose="020B0604020202020204" pitchFamily="34" charset="0"/>
+            </a:endParaRPr>
+          </a:p>
+          <a:p>
+            <a:pPr marL="0" lvl="1">
+              <a:lnSpc>
+                <a:spcPct val="150000"/>
+              </a:lnSpc>
+            </a:pPr>
+            <a:endParaRPr lang="az-Latn-AZ" altLang="en-US" sz="1100" b="1">
+              <a:latin typeface="Arial" panose="020B0604020202020204" pitchFamily="34" charset="0"/>
+            </a:endParaRPr>
+          </a:p>
+          <a:p>
+            <a:pPr marL="0" lvl="1">
+              <a:lnSpc>
+                <a:spcPct val="150000"/>
+              </a:lnSpc>
+            </a:pPr>
+            <a:r>
+              <a:rPr kumimoji="0" lang="en-US" altLang="en-US" sz="1100" i="0" u="none" strike="noStrike" cap="none" normalizeH="0" baseline="0">
+                <a:ln>
+                  <a:noFill/>
+                </a:ln>
+                <a:solidFill>
+                  <a:schemeClr val="tx1"/>
+                </a:solidFill>
+                <a:effectLst/>
+                <a:latin typeface="Arial" panose="020B0604020202020204" pitchFamily="34" charset="0"/>
+              </a:rPr>
+              <a:t>İkinci parametrdəki </a:t>
+            </a:r>
+            <a:r>
+              <a:rPr kumimoji="0" lang="en-US" altLang="en-US" sz="1100" b="1" i="0" u="none" strike="noStrike" cap="none" normalizeH="0" baseline="0">
+                <a:ln>
+                  <a:noFill/>
+                </a:ln>
+                <a:solidFill>
+                  <a:schemeClr val="tx1"/>
+                </a:solidFill>
+                <a:effectLst/>
+                <a:latin typeface="Arial" panose="020B0604020202020204" pitchFamily="34" charset="0"/>
+              </a:rPr>
+              <a:t>1 default </a:t>
+            </a:r>
+            <a:r>
+              <a:rPr kumimoji="0" lang="en-US" altLang="en-US" sz="1100" i="0" u="none" strike="noStrike" cap="none" normalizeH="0" baseline="0">
+                <a:ln>
+                  <a:noFill/>
+                </a:ln>
+                <a:solidFill>
+                  <a:schemeClr val="tx1"/>
+                </a:solidFill>
+                <a:effectLst/>
+                <a:latin typeface="Arial" panose="020B0604020202020204" pitchFamily="34" charset="0"/>
+              </a:rPr>
+              <a:t>dəyər kimi yazılıb. Laravel-in </a:t>
+            </a:r>
+            <a:r>
+              <a:rPr kumimoji="0" lang="en-US" altLang="en-US" sz="1100" b="1" i="0" u="none" strike="noStrike" cap="none" normalizeH="0" baseline="0">
+                <a:ln>
+                  <a:noFill/>
+                </a:ln>
+                <a:solidFill>
+                  <a:schemeClr val="tx1"/>
+                </a:solidFill>
+                <a:effectLst/>
+                <a:latin typeface="Arial" panose="020B0604020202020204" pitchFamily="34" charset="0"/>
+              </a:rPr>
+              <a:t>paginate() </a:t>
+            </a:r>
+            <a:r>
+              <a:rPr kumimoji="0" lang="en-US" altLang="en-US" sz="1100" i="0" u="none" strike="noStrike" cap="none" normalizeH="0" baseline="0">
+                <a:ln>
+                  <a:noFill/>
+                </a:ln>
+                <a:solidFill>
+                  <a:schemeClr val="tx1"/>
+                </a:solidFill>
+                <a:effectLst/>
+                <a:latin typeface="Arial" panose="020B0604020202020204" pitchFamily="34" charset="0"/>
+              </a:rPr>
+              <a:t>metodu artıq avtomatik olaraq </a:t>
+            </a:r>
+            <a:r>
+              <a:rPr kumimoji="0" lang="en-US" altLang="en-US" sz="1100" b="1" i="0" u="none" strike="noStrike" cap="none" normalizeH="0" baseline="0">
+                <a:ln>
+                  <a:noFill/>
+                </a:ln>
+                <a:solidFill>
+                  <a:schemeClr val="tx1"/>
+                </a:solidFill>
+                <a:effectLst/>
+                <a:latin typeface="Arial" panose="020B0604020202020204" pitchFamily="34" charset="0"/>
+              </a:rPr>
+              <a:t>page</a:t>
+            </a:r>
+            <a:r>
+              <a:rPr kumimoji="0" lang="en-US" altLang="en-US" sz="1100" i="0" u="none" strike="noStrike" cap="none" normalizeH="0" baseline="0">
+                <a:ln>
+                  <a:noFill/>
+                </a:ln>
+                <a:solidFill>
+                  <a:schemeClr val="tx1"/>
+                </a:solidFill>
+                <a:effectLst/>
+                <a:latin typeface="Arial" panose="020B0604020202020204" pitchFamily="34" charset="0"/>
+              </a:rPr>
+              <a:t>-i idarə edir, sadəcə biz burada həmin səhifə nömrəsini </a:t>
+            </a:r>
+            <a:r>
+              <a:rPr kumimoji="0" lang="en-US" altLang="en-US" sz="1100" b="1" i="0" u="none" strike="noStrike" cap="none" normalizeH="0" baseline="0">
+                <a:ln>
+                  <a:noFill/>
+                </a:ln>
+                <a:solidFill>
+                  <a:schemeClr val="tx1"/>
+                </a:solidFill>
+                <a:effectLst/>
+                <a:latin typeface="Arial" panose="020B0604020202020204" pitchFamily="34" charset="0"/>
+              </a:rPr>
+              <a:t>cache</a:t>
+            </a:r>
+            <a:r>
+              <a:rPr kumimoji="0" lang="en-US" altLang="en-US" sz="1100" i="0" u="none" strike="noStrike" cap="none" normalizeH="0" baseline="0">
+                <a:ln>
+                  <a:noFill/>
+                </a:ln>
+                <a:solidFill>
+                  <a:schemeClr val="tx1"/>
+                </a:solidFill>
+                <a:effectLst/>
+                <a:latin typeface="Arial" panose="020B0604020202020204" pitchFamily="34" charset="0"/>
+              </a:rPr>
+              <a:t> </a:t>
+            </a:r>
+            <a:r>
+              <a:rPr kumimoji="0" lang="en-US" altLang="en-US" sz="1100" b="1" i="0" u="none" strike="noStrike" cap="none" normalizeH="0" baseline="0">
+                <a:ln>
+                  <a:noFill/>
+                </a:ln>
+                <a:solidFill>
+                  <a:schemeClr val="tx1"/>
+                </a:solidFill>
+                <a:effectLst/>
+                <a:latin typeface="Arial" panose="020B0604020202020204" pitchFamily="34" charset="0"/>
+              </a:rPr>
+              <a:t>key</a:t>
+            </a:r>
+            <a:r>
+              <a:rPr kumimoji="0" lang="en-US" altLang="en-US" sz="1100" i="0" u="none" strike="noStrike" cap="none" normalizeH="0" baseline="0">
+                <a:ln>
+                  <a:noFill/>
+                </a:ln>
+                <a:solidFill>
+                  <a:schemeClr val="tx1"/>
+                </a:solidFill>
+                <a:effectLst/>
+                <a:latin typeface="Arial" panose="020B0604020202020204" pitchFamily="34" charset="0"/>
+              </a:rPr>
+              <a:t>-ə əlavə edirik.  </a:t>
+            </a:r>
+            <a:r>
+              <a:rPr kumimoji="0" lang="en-US" altLang="en-US" sz="1100" b="1" i="0" u="none" strike="noStrike" cap="none" normalizeH="0" baseline="0">
+                <a:ln>
+                  <a:noFill/>
+                </a:ln>
+                <a:solidFill>
+                  <a:schemeClr val="tx1"/>
+                </a:solidFill>
+                <a:effectLst/>
+                <a:latin typeface="Arial" panose="020B0604020202020204" pitchFamily="34" charset="0"/>
+              </a:rPr>
+              <a:t>URL</a:t>
+            </a:r>
+            <a:r>
+              <a:rPr kumimoji="0" lang="en-US" altLang="en-US" sz="1100" i="0" u="none" strike="noStrike" cap="none" normalizeH="0" baseline="0">
+                <a:ln>
+                  <a:noFill/>
+                </a:ln>
+                <a:solidFill>
+                  <a:schemeClr val="tx1"/>
+                </a:solidFill>
+                <a:effectLst/>
+                <a:latin typeface="Arial" panose="020B0604020202020204" pitchFamily="34" charset="0"/>
+              </a:rPr>
+              <a:t> dəyişdikcə (məsələn </a:t>
+            </a:r>
+            <a:r>
+              <a:rPr kumimoji="0" lang="en-US" altLang="en-US" sz="1100" b="1" i="0" u="none" strike="noStrike" cap="none" normalizeH="0" baseline="0">
+                <a:ln>
+                  <a:noFill/>
+                </a:ln>
+                <a:solidFill>
+                  <a:schemeClr val="tx1"/>
+                </a:solidFill>
+                <a:effectLst/>
+                <a:latin typeface="Arial" panose="020B0604020202020204" pitchFamily="34" charset="0"/>
+              </a:rPr>
+              <a:t>/page=2</a:t>
+            </a:r>
+            <a:r>
+              <a:rPr kumimoji="0" lang="en-US" altLang="en-US" sz="1100" i="0" u="none" strike="noStrike" cap="none" normalizeH="0" baseline="0">
+                <a:ln>
+                  <a:noFill/>
+                </a:ln>
+                <a:solidFill>
+                  <a:schemeClr val="tx1"/>
+                </a:solidFill>
+                <a:effectLst/>
+                <a:latin typeface="Arial" panose="020B0604020202020204" pitchFamily="34" charset="0"/>
+              </a:rPr>
+              <a:t>) </a:t>
+            </a:r>
+            <a:r>
+              <a:rPr kumimoji="0" lang="en-US" altLang="en-US" sz="1100" b="1" i="0" u="none" strike="noStrike" cap="none" normalizeH="0" baseline="0">
+                <a:ln>
+                  <a:noFill/>
+                </a:ln>
+                <a:solidFill>
+                  <a:schemeClr val="tx1"/>
+                </a:solidFill>
+                <a:effectLst/>
+                <a:latin typeface="Arial" panose="020B0604020202020204" pitchFamily="34" charset="0"/>
+              </a:rPr>
+              <a:t>request('page') </a:t>
+            </a:r>
+            <a:r>
+              <a:rPr kumimoji="0" lang="en-US" altLang="en-US" sz="1100" i="0" u="none" strike="noStrike" cap="none" normalizeH="0" baseline="0">
+                <a:ln>
+                  <a:noFill/>
+                </a:ln>
+                <a:solidFill>
+                  <a:schemeClr val="tx1"/>
+                </a:solidFill>
+                <a:effectLst/>
+                <a:latin typeface="Arial" panose="020B0604020202020204" pitchFamily="34" charset="0"/>
+              </a:rPr>
+              <a:t>ilə </a:t>
+            </a:r>
+            <a:r>
+              <a:rPr kumimoji="0" lang="en-US" altLang="en-US" sz="1100" b="1" i="0" u="none" strike="noStrike" cap="none" normalizeH="0" baseline="0">
+                <a:ln>
+                  <a:noFill/>
+                </a:ln>
+                <a:solidFill>
+                  <a:schemeClr val="tx1"/>
+                </a:solidFill>
+                <a:effectLst/>
+                <a:latin typeface="Arial" panose="020B0604020202020204" pitchFamily="34" charset="0"/>
+              </a:rPr>
+              <a:t>dinamik</a:t>
+            </a:r>
+            <a:r>
+              <a:rPr kumimoji="0" lang="en-US" altLang="en-US" sz="1100" i="0" u="none" strike="noStrike" cap="none" normalizeH="0" baseline="0">
+                <a:ln>
+                  <a:noFill/>
+                </a:ln>
+                <a:solidFill>
+                  <a:schemeClr val="tx1"/>
+                </a:solidFill>
+                <a:effectLst/>
+                <a:latin typeface="Arial" panose="020B0604020202020204" pitchFamily="34" charset="0"/>
+              </a:rPr>
+              <a:t> olaraq səhifə nömrəsini </a:t>
+            </a:r>
+            <a:r>
+              <a:rPr kumimoji="0" lang="en-US" altLang="en-US" sz="1100" b="1" i="0" u="none" strike="noStrike" cap="none" normalizeH="0" baseline="0">
+                <a:ln>
+                  <a:noFill/>
+                </a:ln>
+                <a:solidFill>
+                  <a:schemeClr val="tx1"/>
+                </a:solidFill>
+                <a:effectLst/>
+                <a:latin typeface="Arial" panose="020B0604020202020204" pitchFamily="34" charset="0"/>
+              </a:rPr>
+              <a:t>alırıq</a:t>
+            </a:r>
+            <a:r>
+              <a:rPr kumimoji="0" lang="en-US" altLang="en-US" sz="1100" i="0" u="none" strike="noStrike" cap="none" normalizeH="0" baseline="0">
                 <a:ln>
                   <a:noFill/>
                 </a:ln>
@@ -3799,6 +5713,66 @@
           </a:p>
         </p:txBody>
       </p:sp>
+      <p:pic>
+        <p:nvPicPr>
+          <p:cNvPr id="4" name="Picture 3">
+            <a:extLst>
+              <a:ext uri="{FF2B5EF4-FFF2-40B4-BE49-F238E27FC236}">
+                <a16:creationId xmlns:a16="http://schemas.microsoft.com/office/drawing/2014/main" id="{ED52F4C8-E862-3F16-EECB-F548350F372C}"/>
+              </a:ext>
+            </a:extLst>
+          </p:cNvPr>
+          <p:cNvPicPr>
+            <a:picLocks noChangeAspect="1"/>
+          </p:cNvPicPr>
+          <p:nvPr/>
+        </p:nvPicPr>
+        <p:blipFill>
+          <a:blip r:embed="rId2"/>
+          <a:stretch>
+            <a:fillRect/>
+          </a:stretch>
+        </p:blipFill>
+        <p:spPr>
+          <a:xfrm>
+            <a:off x="217714" y="1323936"/>
+            <a:ext cx="2886478" cy="552527"/>
+          </a:xfrm>
+          <a:prstGeom prst="rect">
+            <a:avLst/>
+          </a:prstGeom>
+        </p:spPr>
+      </p:pic>
+      <p:pic>
+        <p:nvPicPr>
+          <p:cNvPr id="6" name="Picture 5">
+            <a:extLst>
+              <a:ext uri="{FF2B5EF4-FFF2-40B4-BE49-F238E27FC236}">
+                <a16:creationId xmlns:a16="http://schemas.microsoft.com/office/drawing/2014/main" id="{9261A4D5-2A0B-0645-3DD7-ED9AC75586DC}"/>
+              </a:ext>
+            </a:extLst>
+          </p:cNvPr>
+          <p:cNvPicPr>
+            <a:picLocks noChangeAspect="1"/>
+          </p:cNvPicPr>
+          <p:nvPr/>
+        </p:nvPicPr>
+        <p:blipFill>
+          <a:blip r:embed="rId3"/>
+          <a:stretch>
+            <a:fillRect/>
+          </a:stretch>
+        </p:blipFill>
+        <p:spPr>
+          <a:xfrm>
+            <a:off x="217714" y="3096181"/>
+            <a:ext cx="2048161" cy="514422"/>
+          </a:xfrm>
+          <a:prstGeom prst="rect">
+            <a:avLst/>
+          </a:prstGeom>
+        </p:spPr>
+      </p:pic>
     </p:spTree>
     <p:extLst>
       <p:ext uri="{BB962C8B-B14F-4D97-AF65-F5344CB8AC3E}">
